--- a/tutor-time/question-the-headline/downloads/Question_the_Headline_Lesson_1.pptx
+++ b/tutor-time/question-the-headline/downloads/Question_the_Headline_Lesson_1.pptx
@@ -4209,7 +4209,7 @@
                 </a:solidFill>
                 <a:latin typeface="Georgia"/>
               </a:rPr>
-              <a:t>The industry saw a draft before the review was sent to the journal. Hickson wrote back: “Let me assure you this is quite what we had in mind and we look forward to its appearance in print.” The review said changing fat and cholesterol was the only diet change that could prevent heart disease.</a:t>
+              <a:t>The industry saw a draft before the review was sent to the journal. Hickson wrote back: “Let me assure you this is quite what we had in mind and we look forward to its appearance in print.” The review said cutting fat and cholesterol was the only diet change that could prevent heart disease.</a:t>
             </a:r>
           </a:p>
         </p:txBody>
@@ -9522,7 +9522,7 @@
                 </a:solidFill>
                 <a:latin typeface="Karla"/>
               </a:rPr>
-              <a:t>The review blames fat and says nothing about who paid for it.</a:t>
+              <a:t>The review blames fat and does not mention the sugar industry’s money.</a:t>
             </a:r>
           </a:p>
         </p:txBody>
@@ -16681,7 +16681,7 @@
                 </a:solidFill>
                 <a:latin typeface="Karla"/>
               </a:rPr>
-              <a:t>Tested on who, for how long, and by somebody with nothing to gain?</a:t>
+              <a:t>Tested on whom, for how long, and by somebody with nothing to gain?</a:t>
             </a:r>
           </a:p>
         </p:txBody>

--- a/tutor-time/question-the-headline/downloads/Question_the_Headline_Lesson_1.pptx
+++ b/tutor-time/question-the-headline/downloads/Question_the_Headline_Lesson_1.pptx
@@ -3186,7 +3186,7 @@
                 <a:solidFill>
                   <a:srgbClr val="34322F"/>
                 </a:solidFill>
-                <a:latin typeface="Karla"/>
+                <a:latin typeface="Calibri"/>
               </a:rPr>
               <a:t>TUTOR TIME  ·  QUESTION THE HEADLINE  ·  LESSON 1 OF 5</a:t>
             </a:r>
@@ -3269,11 +3269,11 @@
               </a:spcAft>
             </a:pPr>
             <a:r>
-              <a:rPr sz="3000" b="1" i="0">
+              <a:rPr sz="3000" b="0" i="0">
                 <a:solidFill>
                   <a:srgbClr val="262422"/>
                 </a:solidFill>
-                <a:latin typeface="Libre Caslon Display"/>
+                <a:latin typeface="Georgia"/>
               </a:rPr>
               <a:t>The Daily Claim</a:t>
             </a:r>
@@ -3360,7 +3360,7 @@
                 <a:solidFill>
                   <a:srgbClr val="56524B"/>
                 </a:solidFill>
-                <a:latin typeface="Karla"/>
+                <a:latin typeface="Calibri"/>
               </a:rPr>
               <a:t>BOSTON, 1967</a:t>
             </a:r>
@@ -3403,7 +3403,7 @@
                 <a:solidFill>
                   <a:srgbClr val="56524B"/>
                 </a:solidFill>
-                <a:latin typeface="Karla"/>
+                <a:latin typeface="Calibri"/>
               </a:rPr>
               <a:t>VOLUME ONE</a:t>
             </a:r>
@@ -3446,7 +3446,7 @@
                 <a:solidFill>
                   <a:srgbClr val="56524B"/>
                 </a:solidFill>
-                <a:latin typeface="Karla"/>
+                <a:latin typeface="Calibri"/>
               </a:rPr>
               <a:t>TUTOR TIME</a:t>
             </a:r>
@@ -3529,11 +3529,11 @@
               </a:spcAft>
             </a:pPr>
             <a:r>
-              <a:rPr sz="4200" b="1" i="0">
+              <a:rPr sz="4200" b="0" i="0">
                 <a:solidFill>
                   <a:srgbClr val="262422"/>
                 </a:solidFill>
-                <a:latin typeface="Libre Caslon Display"/>
+                <a:latin typeface="Georgia"/>
               </a:rPr>
               <a:t>Who Paid for the Science?</a:t>
             </a:r>
@@ -3620,7 +3620,7 @@
                 <a:solidFill>
                   <a:srgbClr val="56524B"/>
                 </a:solidFill>
-                <a:latin typeface="Karla"/>
+                <a:latin typeface="Calibri"/>
               </a:rPr>
               <a:t>A claim that was printed as true, and four pieces of evidence to test it.</a:t>
             </a:r>
@@ -3675,7 +3675,7 @@
                 <a:solidFill>
                   <a:srgbClr val="FFFDF7"/>
                 </a:solidFill>
-                <a:latin typeface="Karla"/>
+                <a:latin typeface="Calibri"/>
               </a:rPr>
               <a:t>VOLUME ONE</a:t>
             </a:r>
@@ -3743,7 +3743,7 @@
                 <a:solidFill>
                   <a:srgbClr val="8C877D"/>
                 </a:solidFill>
-                <a:latin typeface="Karla"/>
+                <a:latin typeface="Calibri"/>
               </a:rPr>
               <a:t>The Pastoral Guide</a:t>
             </a:r>
@@ -3786,7 +3786,7 @@
                 <a:solidFill>
                   <a:srgbClr val="8C877D"/>
                 </a:solidFill>
-                <a:latin typeface="Karla"/>
+                <a:latin typeface="Calibri"/>
               </a:rPr>
               <a:t>1 / 19</a:t>
             </a:r>
@@ -3891,7 +3891,7 @@
                 <a:solidFill>
                   <a:srgbClr val="34322F"/>
                 </a:solidFill>
-                <a:latin typeface="Karla"/>
+                <a:latin typeface="Calibri"/>
               </a:rPr>
               <a:t>QUESTION THE HEADLINE  ·  LESSON 1 OF 5</a:t>
             </a:r>
@@ -3946,7 +3946,7 @@
                 <a:solidFill>
                   <a:srgbClr val="FFFDF7"/>
                 </a:solidFill>
-                <a:latin typeface="Karla"/>
+                <a:latin typeface="Calibri"/>
               </a:rPr>
               <a:t>ROUND 3 OF 4</a:t>
             </a:r>
@@ -4033,7 +4033,7 @@
                 <a:solidFill>
                   <a:srgbClr val="FFFDF7"/>
                 </a:solidFill>
-                <a:latin typeface="Karla"/>
+                <a:latin typeface="Calibri"/>
               </a:rPr>
               <a:t>EVIDENCE C</a:t>
             </a:r>
@@ -4160,11 +4160,11 @@
               </a:spcAft>
             </a:pPr>
             <a:r>
-              <a:rPr sz="2200" b="1" i="0">
+              <a:rPr sz="2200" b="0" i="0">
                 <a:solidFill>
                   <a:srgbClr val="262422"/>
                 </a:solidFill>
-                <a:latin typeface="Libre Caslon Display"/>
+                <a:latin typeface="Georgia"/>
               </a:rPr>
               <a:t>The letter</a:t>
             </a:r>
@@ -4250,7 +4250,7 @@
                 <a:solidFill>
                   <a:srgbClr val="8C877D"/>
                 </a:solidFill>
-                <a:latin typeface="Karla"/>
+                <a:latin typeface="Calibri"/>
               </a:rPr>
               <a:t>Source: Quoted in STAT News, 2016</a:t>
             </a:r>
@@ -4293,7 +4293,7 @@
                 <a:solidFill>
                   <a:srgbClr val="34322F"/>
                 </a:solidFill>
-                <a:latin typeface="Karla"/>
+                <a:latin typeface="Calibri"/>
               </a:rPr>
               <a:t>Read it as a group. Fill in the card C row on your evidence sheet, then move on the line.</a:t>
             </a:r>
@@ -4361,7 +4361,7 @@
                 <a:solidFill>
                   <a:srgbClr val="8C877D"/>
                 </a:solidFill>
-                <a:latin typeface="Karla"/>
+                <a:latin typeface="Calibri"/>
               </a:rPr>
               <a:t>The Pastoral Guide</a:t>
             </a:r>
@@ -4404,7 +4404,7 @@
                 <a:solidFill>
                   <a:srgbClr val="8C877D"/>
                 </a:solidFill>
-                <a:latin typeface="Karla"/>
+                <a:latin typeface="Calibri"/>
               </a:rPr>
               <a:t>10 / 19</a:t>
             </a:r>
@@ -4509,7 +4509,7 @@
                 <a:solidFill>
                   <a:srgbClr val="34322F"/>
                 </a:solidFill>
-                <a:latin typeface="Karla"/>
+                <a:latin typeface="Calibri"/>
               </a:rPr>
               <a:t>QUESTION THE HEADLINE  ·  LESSON 1 OF 5</a:t>
             </a:r>
@@ -4518,19 +4518,147 @@
       </p:sp>
       <p:sp>
         <p:nvSpPr>
-          <p:cNvPr id="4" name="Rounded Rectangle 3"/>
+          <p:cNvPr id="5" name="TextBox 4"/>
+          <p:cNvSpPr txBox="1"/>
+          <p:nvPr/>
+        </p:nvSpPr>
+        <p:spPr>
+          <a:xfrm>
+            <a:off x="685800" y="566928"/>
+            <a:ext cx="7772400" cy="434848"/>
+          </a:xfrm>
+          <a:prstGeom prst="rect">
+            <a:avLst/>
+          </a:prstGeom>
+          <a:noFill/>
+          <a:effectLst/>
+        </p:spPr>
+        <p:txBody>
+          <a:bodyPr wrap="square" anchor="t" lIns="0" rIns="0" tIns="0" bIns="0">
+            <a:spAutoFit/>
+          </a:bodyPr>
+          <a:lstStyle/>
+          <a:p>
+            <a:pPr algn="l">
+              <a:lnSpc>
+                <a:spcPct val="105000"/>
+              </a:lnSpc>
+              <a:spcAft>
+                <a:spcPts val="0"/>
+              </a:spcAft>
+            </a:pPr>
+            <a:r>
+              <a:rPr sz="2800" b="0" i="0">
+                <a:solidFill>
+                  <a:srgbClr val="262422"/>
+                </a:solidFill>
+                <a:latin typeface="Georgia"/>
+              </a:rPr>
+              <a:t>What do the numbers say?</a:t>
+            </a:r>
+          </a:p>
+        </p:txBody>
+      </p:sp>
+      <p:sp>
+        <p:nvSpPr>
+          <p:cNvPr id="6" name="TextBox 5"/>
+          <p:cNvSpPr txBox="1"/>
+          <p:nvPr/>
+        </p:nvSpPr>
+        <p:spPr>
+          <a:xfrm>
+            <a:off x="685800" y="1133856"/>
+            <a:ext cx="7772400" cy="274320"/>
+          </a:xfrm>
+          <a:prstGeom prst="rect">
+            <a:avLst/>
+          </a:prstGeom>
+          <a:noFill/>
+          <a:effectLst/>
+        </p:spPr>
+        <p:txBody>
+          <a:bodyPr wrap="square" anchor="t" lIns="0" rIns="0" tIns="0" bIns="0">
+            <a:spAutoFit/>
+          </a:bodyPr>
+          <a:lstStyle/>
+          <a:p>
+            <a:pPr algn="l">
+              <a:lnSpc>
+                <a:spcPct val="125000"/>
+              </a:lnSpc>
+              <a:spcAft>
+                <a:spcPts val="0"/>
+              </a:spcAft>
+            </a:pPr>
+            <a:r>
+              <a:rPr sz="1250" b="0" i="0">
+                <a:solidFill>
+                  <a:srgbClr val="56524B"/>
+                </a:solidFill>
+                <a:latin typeface="Calibri"/>
+              </a:rPr>
+              <a:t>Work them out in your group. Write your working on your evidence sheet.</a:t>
+            </a:r>
+          </a:p>
+        </p:txBody>
+      </p:sp>
+      <p:sp>
+        <p:nvSpPr>
+          <p:cNvPr id="7" name="Rectangle 6"/>
           <p:cNvSpPr/>
           <p:nvPr/>
         </p:nvSpPr>
         <p:spPr>
           <a:xfrm>
-            <a:off x="6406362" y="246888"/>
-            <a:ext cx="2051837" cy="237744"/>
-          </a:xfrm>
-          <a:prstGeom prst="roundRect">
-            <a:avLst>
-              <a:gd name="adj" fmla="val 50000"/>
-            </a:avLst>
+            <a:off x="685800" y="1481328"/>
+            <a:ext cx="7772400" cy="699516"/>
+          </a:xfrm>
+          <a:prstGeom prst="rect">
+            <a:avLst/>
+          </a:prstGeom>
+          <a:solidFill>
+            <a:srgbClr val="FFFFFF"/>
+          </a:solidFill>
+          <a:ln>
+            <a:noFill/>
+          </a:ln>
+          <a:effectLst/>
+        </p:spPr>
+        <p:style>
+          <a:lnRef idx="1">
+            <a:schemeClr val="accent1"/>
+          </a:lnRef>
+          <a:fillRef idx="3">
+            <a:schemeClr val="accent1"/>
+          </a:fillRef>
+          <a:effectRef idx="0">
+            <a:schemeClr val="accent1"/>
+          </a:effectRef>
+          <a:fontRef idx="minor">
+            <a:schemeClr val="lt1"/>
+          </a:fontRef>
+        </p:style>
+        <p:txBody>
+          <a:bodyPr rtlCol="0" anchor="ctr"/>
+          <a:lstStyle/>
+          <a:p>
+            <a:pPr algn="ctr"/>
+          </a:p>
+        </p:txBody>
+      </p:sp>
+      <p:sp>
+        <p:nvSpPr>
+          <p:cNvPr id="8" name="Oval 7"/>
+          <p:cNvSpPr/>
+          <p:nvPr/>
+        </p:nvSpPr>
+        <p:spPr>
+          <a:xfrm>
+            <a:off x="868680" y="1563624"/>
+            <a:ext cx="329184" cy="329184"/>
+          </a:xfrm>
+          <a:prstGeom prst="ellipse">
+            <a:avLst/>
           </a:prstGeom>
           <a:solidFill>
             <a:srgbClr val="34322F"/>
@@ -4555,32 +4683,66 @@
           </a:fontRef>
         </p:style>
         <p:txBody>
-          <a:bodyPr rtlCol="0" anchor="ctr" wrap="none" lIns="0" rIns="0" tIns="0" bIns="0"/>
+          <a:bodyPr rtlCol="0" anchor="ctr"/>
           <a:lstStyle/>
           <a:p>
             <a:pPr algn="ctr"/>
-            <a:r>
-              <a:rPr sz="950" b="1" spc="90">
+          </a:p>
+        </p:txBody>
+      </p:sp>
+      <p:sp>
+        <p:nvSpPr>
+          <p:cNvPr id="9" name="TextBox 8"/>
+          <p:cNvSpPr txBox="1"/>
+          <p:nvPr/>
+        </p:nvSpPr>
+        <p:spPr>
+          <a:xfrm>
+            <a:off x="868680" y="1636776"/>
+            <a:ext cx="329184" cy="182880"/>
+          </a:xfrm>
+          <a:prstGeom prst="rect">
+            <a:avLst/>
+          </a:prstGeom>
+          <a:noFill/>
+          <a:effectLst/>
+        </p:spPr>
+        <p:txBody>
+          <a:bodyPr wrap="square" anchor="t" lIns="0" rIns="0" tIns="0" bIns="0">
+            <a:spAutoFit/>
+          </a:bodyPr>
+          <a:lstStyle/>
+          <a:p>
+            <a:pPr algn="ctr">
+              <a:lnSpc>
+                <a:spcPct val="125000"/>
+              </a:lnSpc>
+              <a:spcAft>
+                <a:spcPts val="0"/>
+              </a:spcAft>
+            </a:pPr>
+            <a:r>
+              <a:rPr sz="1050" b="1" i="0">
                 <a:solidFill>
                   <a:srgbClr val="FFFDF7"/>
                 </a:solidFill>
-                <a:latin typeface="Karla"/>
-              </a:rPr>
-              <a:t>CRUNCH THE NUMBERS</a:t>
-            </a:r>
-          </a:p>
-        </p:txBody>
-      </p:sp>
-      <p:sp>
-        <p:nvSpPr>
-          <p:cNvPr id="5" name="TextBox 4"/>
-          <p:cNvSpPr txBox="1"/>
-          <p:nvPr/>
-        </p:nvSpPr>
-        <p:spPr>
-          <a:xfrm>
-            <a:off x="685800" y="566928"/>
-            <a:ext cx="7772400" cy="434848"/>
+                <a:latin typeface="Calibri"/>
+              </a:rPr>
+              <a:t>1</a:t>
+            </a:r>
+          </a:p>
+        </p:txBody>
+      </p:sp>
+      <p:sp>
+        <p:nvSpPr>
+          <p:cNvPr id="10" name="TextBox 9"/>
+          <p:cNvSpPr txBox="1"/>
+          <p:nvPr/>
+        </p:nvSpPr>
+        <p:spPr>
+          <a:xfrm>
+            <a:off x="1371600" y="1591056"/>
+            <a:ext cx="6903720" cy="480060"/>
           </a:xfrm>
           <a:prstGeom prst="rect">
             <a:avLst/>
@@ -4596,76 +4758,33 @@
           <a:p>
             <a:pPr algn="l">
               <a:lnSpc>
-                <a:spcPct val="105000"/>
-              </a:lnSpc>
-              <a:spcAft>
-                <a:spcPts val="0"/>
-              </a:spcAft>
-            </a:pPr>
-            <a:r>
-              <a:rPr sz="2800" b="1" i="0">
+                <a:spcPct val="120000"/>
+              </a:lnSpc>
+              <a:spcAft>
+                <a:spcPts val="0"/>
+              </a:spcAft>
+            </a:pPr>
+            <a:r>
+              <a:rPr sz="1500" b="1" i="0">
                 <a:solidFill>
                   <a:srgbClr val="262422"/>
                 </a:solidFill>
-                <a:latin typeface="Libre Caslon Display"/>
-              </a:rPr>
-              <a:t>What do the numbers say?</a:t>
-            </a:r>
-          </a:p>
-        </p:txBody>
-      </p:sp>
-      <p:sp>
-        <p:nvSpPr>
-          <p:cNvPr id="6" name="TextBox 5"/>
-          <p:cNvSpPr txBox="1"/>
-          <p:nvPr/>
-        </p:nvSpPr>
-        <p:spPr>
-          <a:xfrm>
-            <a:off x="685800" y="1133856"/>
-            <a:ext cx="7772400" cy="274320"/>
-          </a:xfrm>
-          <a:prstGeom prst="rect">
-            <a:avLst/>
-          </a:prstGeom>
-          <a:noFill/>
-          <a:effectLst/>
-        </p:spPr>
-        <p:txBody>
-          <a:bodyPr wrap="square" anchor="t" lIns="0" rIns="0" tIns="0" bIns="0">
-            <a:spAutoFit/>
-          </a:bodyPr>
-          <a:lstStyle/>
-          <a:p>
-            <a:pPr algn="l">
-              <a:lnSpc>
-                <a:spcPct val="125000"/>
-              </a:lnSpc>
-              <a:spcAft>
-                <a:spcPts val="0"/>
-              </a:spcAft>
-            </a:pPr>
-            <a:r>
-              <a:rPr sz="1250" b="0" i="0">
-                <a:solidFill>
-                  <a:srgbClr val="56524B"/>
-                </a:solidFill>
-                <a:latin typeface="Karla"/>
-              </a:rPr>
-              <a:t>Work them out in your group. Write your working on your evidence sheet.</a:t>
-            </a:r>
-          </a:p>
-        </p:txBody>
-      </p:sp>
-      <p:sp>
-        <p:nvSpPr>
-          <p:cNvPr id="7" name="Rectangle 6"/>
+                <a:latin typeface="Calibri"/>
+              </a:rPr>
+              <a:t>The fee was $6,500 in 1965, about $48,000 in 2016 money. Roughly how many times more is the 2016 figure?</a:t>
+            </a:r>
+          </a:p>
+        </p:txBody>
+      </p:sp>
+      <p:sp>
+        <p:nvSpPr>
+          <p:cNvPr id="11" name="Rectangle 10"/>
           <p:cNvSpPr/>
           <p:nvPr/>
         </p:nvSpPr>
         <p:spPr>
           <a:xfrm>
-            <a:off x="685800" y="1481328"/>
+            <a:off x="685800" y="2345436"/>
             <a:ext cx="7772400" cy="699516"/>
           </a:xfrm>
           <a:prstGeom prst="rect">
@@ -4703,13 +4822,13 @@
       </p:sp>
       <p:sp>
         <p:nvSpPr>
-          <p:cNvPr id="8" name="Oval 7"/>
+          <p:cNvPr id="12" name="Oval 11"/>
           <p:cNvSpPr/>
           <p:nvPr/>
         </p:nvSpPr>
         <p:spPr>
           <a:xfrm>
-            <a:off x="868680" y="1563624"/>
+            <a:off x="868680" y="2427732"/>
             <a:ext cx="329184" cy="329184"/>
           </a:xfrm>
           <a:prstGeom prst="ellipse">
@@ -4747,13 +4866,13 @@
       </p:sp>
       <p:sp>
         <p:nvSpPr>
-          <p:cNvPr id="9" name="TextBox 8"/>
-          <p:cNvSpPr txBox="1"/>
-          <p:nvPr/>
-        </p:nvSpPr>
-        <p:spPr>
-          <a:xfrm>
-            <a:off x="868680" y="1636776"/>
+          <p:cNvPr id="13" name="TextBox 12"/>
+          <p:cNvSpPr txBox="1"/>
+          <p:nvPr/>
+        </p:nvSpPr>
+        <p:spPr>
+          <a:xfrm>
+            <a:off x="868680" y="2500884"/>
             <a:ext cx="329184" cy="182880"/>
           </a:xfrm>
           <a:prstGeom prst="rect">
@@ -4781,22 +4900,22 @@
                 <a:solidFill>
                   <a:srgbClr val="FFFDF7"/>
                 </a:solidFill>
-                <a:latin typeface="Karla"/>
-              </a:rPr>
-              <a:t>1</a:t>
-            </a:r>
-          </a:p>
-        </p:txBody>
-      </p:sp>
-      <p:sp>
-        <p:nvSpPr>
-          <p:cNvPr id="10" name="TextBox 9"/>
-          <p:cNvSpPr txBox="1"/>
-          <p:nvPr/>
-        </p:nvSpPr>
-        <p:spPr>
-          <a:xfrm>
-            <a:off x="1371600" y="1591056"/>
+                <a:latin typeface="Calibri"/>
+              </a:rPr>
+              <a:t>2</a:t>
+            </a:r>
+          </a:p>
+        </p:txBody>
+      </p:sp>
+      <p:sp>
+        <p:nvSpPr>
+          <p:cNvPr id="14" name="TextBox 13"/>
+          <p:cNvSpPr txBox="1"/>
+          <p:nvPr/>
+        </p:nvSpPr>
+        <p:spPr>
+          <a:xfrm>
+            <a:off x="1371600" y="2455164"/>
             <a:ext cx="6903720" cy="480060"/>
           </a:xfrm>
           <a:prstGeom prst="rect">
@@ -4824,23 +4943,23 @@
                 <a:solidFill>
                   <a:srgbClr val="262422"/>
                 </a:solidFill>
-                <a:latin typeface="Karla"/>
-              </a:rPr>
-              <a:t>The fee was $6,500 in 1965, about $48,000 in 2016 money. Roughly how many times more is the 2016 figure?</a:t>
-            </a:r>
-          </a:p>
-        </p:txBody>
-      </p:sp>
-      <p:sp>
-        <p:nvSpPr>
-          <p:cNvPr id="11" name="Rectangle 10"/>
+                <a:latin typeface="Calibri"/>
+              </a:rPr>
+              <a:t>How many years passed between the review coming out (1967) and the letters being published (2016)?</a:t>
+            </a:r>
+          </a:p>
+        </p:txBody>
+      </p:sp>
+      <p:sp>
+        <p:nvSpPr>
+          <p:cNvPr id="15" name="Rectangle 14"/>
           <p:cNvSpPr/>
           <p:nvPr/>
         </p:nvSpPr>
         <p:spPr>
           <a:xfrm>
-            <a:off x="685800" y="2345436"/>
-            <a:ext cx="7772400" cy="699516"/>
+            <a:off x="685800" y="3209544"/>
+            <a:ext cx="7772400" cy="939545"/>
           </a:xfrm>
           <a:prstGeom prst="rect">
             <a:avLst/>
@@ -4877,13 +4996,13 @@
       </p:sp>
       <p:sp>
         <p:nvSpPr>
-          <p:cNvPr id="12" name="Oval 11"/>
+          <p:cNvPr id="16" name="Oval 15"/>
           <p:cNvSpPr/>
           <p:nvPr/>
         </p:nvSpPr>
         <p:spPr>
           <a:xfrm>
-            <a:off x="868680" y="2427732"/>
+            <a:off x="868680" y="3291840"/>
             <a:ext cx="329184" cy="329184"/>
           </a:xfrm>
           <a:prstGeom prst="ellipse">
@@ -4921,180 +5040,6 @@
       </p:sp>
       <p:sp>
         <p:nvSpPr>
-          <p:cNvPr id="13" name="TextBox 12"/>
-          <p:cNvSpPr txBox="1"/>
-          <p:nvPr/>
-        </p:nvSpPr>
-        <p:spPr>
-          <a:xfrm>
-            <a:off x="868680" y="2500884"/>
-            <a:ext cx="329184" cy="182880"/>
-          </a:xfrm>
-          <a:prstGeom prst="rect">
-            <a:avLst/>
-          </a:prstGeom>
-          <a:noFill/>
-          <a:effectLst/>
-        </p:spPr>
-        <p:txBody>
-          <a:bodyPr wrap="square" anchor="t" lIns="0" rIns="0" tIns="0" bIns="0">
-            <a:spAutoFit/>
-          </a:bodyPr>
-          <a:lstStyle/>
-          <a:p>
-            <a:pPr algn="ctr">
-              <a:lnSpc>
-                <a:spcPct val="125000"/>
-              </a:lnSpc>
-              <a:spcAft>
-                <a:spcPts val="0"/>
-              </a:spcAft>
-            </a:pPr>
-            <a:r>
-              <a:rPr sz="1050" b="1" i="0">
-                <a:solidFill>
-                  <a:srgbClr val="FFFDF7"/>
-                </a:solidFill>
-                <a:latin typeface="Karla"/>
-              </a:rPr>
-              <a:t>2</a:t>
-            </a:r>
-          </a:p>
-        </p:txBody>
-      </p:sp>
-      <p:sp>
-        <p:nvSpPr>
-          <p:cNvPr id="14" name="TextBox 13"/>
-          <p:cNvSpPr txBox="1"/>
-          <p:nvPr/>
-        </p:nvSpPr>
-        <p:spPr>
-          <a:xfrm>
-            <a:off x="1371600" y="2455164"/>
-            <a:ext cx="6903720" cy="480060"/>
-          </a:xfrm>
-          <a:prstGeom prst="rect">
-            <a:avLst/>
-          </a:prstGeom>
-          <a:noFill/>
-          <a:effectLst/>
-        </p:spPr>
-        <p:txBody>
-          <a:bodyPr wrap="square" anchor="t" lIns="0" rIns="0" tIns="0" bIns="0">
-            <a:spAutoFit/>
-          </a:bodyPr>
-          <a:lstStyle/>
-          <a:p>
-            <a:pPr algn="l">
-              <a:lnSpc>
-                <a:spcPct val="120000"/>
-              </a:lnSpc>
-              <a:spcAft>
-                <a:spcPts val="0"/>
-              </a:spcAft>
-            </a:pPr>
-            <a:r>
-              <a:rPr sz="1500" b="1" i="0">
-                <a:solidFill>
-                  <a:srgbClr val="262422"/>
-                </a:solidFill>
-                <a:latin typeface="Karla"/>
-              </a:rPr>
-              <a:t>How many years passed between the review coming out (1967) and the letters being published (2016)?</a:t>
-            </a:r>
-          </a:p>
-        </p:txBody>
-      </p:sp>
-      <p:sp>
-        <p:nvSpPr>
-          <p:cNvPr id="15" name="Rectangle 14"/>
-          <p:cNvSpPr/>
-          <p:nvPr/>
-        </p:nvSpPr>
-        <p:spPr>
-          <a:xfrm>
-            <a:off x="685800" y="3209544"/>
-            <a:ext cx="7772400" cy="939545"/>
-          </a:xfrm>
-          <a:prstGeom prst="rect">
-            <a:avLst/>
-          </a:prstGeom>
-          <a:solidFill>
-            <a:srgbClr val="FFFFFF"/>
-          </a:solidFill>
-          <a:ln>
-            <a:noFill/>
-          </a:ln>
-          <a:effectLst/>
-        </p:spPr>
-        <p:style>
-          <a:lnRef idx="1">
-            <a:schemeClr val="accent1"/>
-          </a:lnRef>
-          <a:fillRef idx="3">
-            <a:schemeClr val="accent1"/>
-          </a:fillRef>
-          <a:effectRef idx="0">
-            <a:schemeClr val="accent1"/>
-          </a:effectRef>
-          <a:fontRef idx="minor">
-            <a:schemeClr val="lt1"/>
-          </a:fontRef>
-        </p:style>
-        <p:txBody>
-          <a:bodyPr rtlCol="0" anchor="ctr"/>
-          <a:lstStyle/>
-          <a:p>
-            <a:pPr algn="ctr"/>
-          </a:p>
-        </p:txBody>
-      </p:sp>
-      <p:sp>
-        <p:nvSpPr>
-          <p:cNvPr id="16" name="Oval 15"/>
-          <p:cNvSpPr/>
-          <p:nvPr/>
-        </p:nvSpPr>
-        <p:spPr>
-          <a:xfrm>
-            <a:off x="868680" y="3291840"/>
-            <a:ext cx="329184" cy="329184"/>
-          </a:xfrm>
-          <a:prstGeom prst="ellipse">
-            <a:avLst/>
-          </a:prstGeom>
-          <a:solidFill>
-            <a:srgbClr val="34322F"/>
-          </a:solidFill>
-          <a:ln>
-            <a:noFill/>
-          </a:ln>
-          <a:effectLst/>
-        </p:spPr>
-        <p:style>
-          <a:lnRef idx="1">
-            <a:schemeClr val="accent1"/>
-          </a:lnRef>
-          <a:fillRef idx="3">
-            <a:schemeClr val="accent1"/>
-          </a:fillRef>
-          <a:effectRef idx="0">
-            <a:schemeClr val="accent1"/>
-          </a:effectRef>
-          <a:fontRef idx="minor">
-            <a:schemeClr val="lt1"/>
-          </a:fontRef>
-        </p:style>
-        <p:txBody>
-          <a:bodyPr rtlCol="0" anchor="ctr"/>
-          <a:lstStyle/>
-          <a:p>
-            <a:pPr algn="ctr"/>
-          </a:p>
-        </p:txBody>
-      </p:sp>
-      <p:sp>
-        <p:nvSpPr>
           <p:cNvPr id="17" name="TextBox 16"/>
           <p:cNvSpPr txBox="1"/>
           <p:nvPr/>
@@ -5129,7 +5074,7 @@
                 <a:solidFill>
                   <a:srgbClr val="FFFDF7"/>
                 </a:solidFill>
-                <a:latin typeface="Karla"/>
+                <a:latin typeface="Calibri"/>
               </a:rPr>
               <a:t>3</a:t>
             </a:r>
@@ -5172,7 +5117,7 @@
                 <a:solidFill>
                   <a:srgbClr val="262422"/>
                 </a:solidFill>
-                <a:latin typeface="Karla"/>
+                <a:latin typeface="Calibri"/>
               </a:rPr>
               <a:t>The journal started asking authors who paid them in 1984. How many years after the review was that, and why might it matter?</a:t>
             </a:r>
@@ -5240,7 +5185,7 @@
                 <a:solidFill>
                   <a:srgbClr val="8C877D"/>
                 </a:solidFill>
-                <a:latin typeface="Karla"/>
+                <a:latin typeface="Calibri"/>
               </a:rPr>
               <a:t>The Pastoral Guide</a:t>
             </a:r>
@@ -5283,7 +5228,7 @@
                 <a:solidFill>
                   <a:srgbClr val="8C877D"/>
                 </a:solidFill>
-                <a:latin typeface="Karla"/>
+                <a:latin typeface="Calibri"/>
               </a:rPr>
               <a:t>11 / 19</a:t>
             </a:r>
@@ -5388,7 +5333,7 @@
                 <a:solidFill>
                   <a:srgbClr val="34322F"/>
                 </a:solidFill>
-                <a:latin typeface="Karla"/>
+                <a:latin typeface="Calibri"/>
               </a:rPr>
               <a:t>QUESTION THE HEADLINE  ·  LESSON 1 OF 5</a:t>
             </a:r>
@@ -5443,7 +5388,7 @@
                 <a:solidFill>
                   <a:srgbClr val="FFFDF7"/>
                 </a:solidFill>
-                <a:latin typeface="Karla"/>
+                <a:latin typeface="Calibri"/>
               </a:rPr>
               <a:t>THE ANSWERS</a:t>
             </a:r>
@@ -5482,11 +5427,11 @@
               </a:spcAft>
             </a:pPr>
             <a:r>
-              <a:rPr sz="2800" b="1" i="0">
+              <a:rPr sz="2800" b="0" i="0">
                 <a:solidFill>
                   <a:srgbClr val="262422"/>
                 </a:solidFill>
-                <a:latin typeface="Libre Caslon Display"/>
+                <a:latin typeface="Georgia"/>
               </a:rPr>
               <a:t>Check your working</a:t>
             </a:r>
@@ -5529,7 +5474,7 @@
                 <a:solidFill>
                   <a:srgbClr val="56524B"/>
                 </a:solidFill>
-                <a:latin typeface="Karla"/>
+                <a:latin typeface="Calibri"/>
               </a:rPr>
               <a:t>Mark your own. A different method that gets the same answer is fine.</a:t>
             </a:r>
@@ -5660,7 +5605,7 @@
                 <a:solidFill>
                   <a:srgbClr val="FFFDF7"/>
                 </a:solidFill>
-                <a:latin typeface="Karla"/>
+                <a:latin typeface="Calibri"/>
               </a:rPr>
               <a:t>1</a:t>
             </a:r>
@@ -5703,7 +5648,7 @@
                 <a:solidFill>
                   <a:srgbClr val="262422"/>
                 </a:solidFill>
-                <a:latin typeface="Karla"/>
+                <a:latin typeface="Calibri"/>
               </a:rPr>
               <a:t>The fee was $6,500 in 1965, about $48,000 in 2016 money. Roughly how many times more is the 2016 figure?</a:t>
             </a:r>
@@ -5746,7 +5691,7 @@
                 <a:solidFill>
                   <a:srgbClr val="34322F"/>
                 </a:solidFill>
-                <a:latin typeface="Karla"/>
+                <a:latin typeface="Calibri"/>
               </a:rPr>
               <a:t>About 7 times (48,000 ÷ 6,500 = 7.4).</a:t>
             </a:r>
@@ -5877,7 +5822,7 @@
                 <a:solidFill>
                   <a:srgbClr val="FFFDF7"/>
                 </a:solidFill>
-                <a:latin typeface="Karla"/>
+                <a:latin typeface="Calibri"/>
               </a:rPr>
               <a:t>2</a:t>
             </a:r>
@@ -5920,7 +5865,7 @@
                 <a:solidFill>
                   <a:srgbClr val="262422"/>
                 </a:solidFill>
-                <a:latin typeface="Karla"/>
+                <a:latin typeface="Calibri"/>
               </a:rPr>
               <a:t>How many years passed between the review coming out (1967) and the letters being published (2016)?</a:t>
             </a:r>
@@ -5963,7 +5908,7 @@
                 <a:solidFill>
                   <a:srgbClr val="34322F"/>
                 </a:solidFill>
-                <a:latin typeface="Karla"/>
+                <a:latin typeface="Calibri"/>
               </a:rPr>
               <a:t>49 years.</a:t>
             </a:r>
@@ -6094,7 +6039,7 @@
                 <a:solidFill>
                   <a:srgbClr val="FFFDF7"/>
                 </a:solidFill>
-                <a:latin typeface="Karla"/>
+                <a:latin typeface="Calibri"/>
               </a:rPr>
               <a:t>3</a:t>
             </a:r>
@@ -6137,7 +6082,7 @@
                 <a:solidFill>
                   <a:srgbClr val="262422"/>
                 </a:solidFill>
-                <a:latin typeface="Karla"/>
+                <a:latin typeface="Calibri"/>
               </a:rPr>
               <a:t>The journal started asking authors who paid them in 1984. How many years after the review was that, and why might it matter?</a:t>
             </a:r>
@@ -6180,7 +6125,7 @@
                 <a:solidFill>
                   <a:srgbClr val="34322F"/>
                 </a:solidFill>
-                <a:latin typeface="Karla"/>
+                <a:latin typeface="Calibri"/>
               </a:rPr>
               <a:t>17 years. Until then, readers had no way of knowing who had paid for a study.</a:t>
             </a:r>
@@ -6248,7 +6193,7 @@
                 <a:solidFill>
                   <a:srgbClr val="8C877D"/>
                 </a:solidFill>
-                <a:latin typeface="Karla"/>
+                <a:latin typeface="Calibri"/>
               </a:rPr>
               <a:t>The Pastoral Guide</a:t>
             </a:r>
@@ -6291,7 +6236,7 @@
                 <a:solidFill>
                   <a:srgbClr val="8C877D"/>
                 </a:solidFill>
-                <a:latin typeface="Karla"/>
+                <a:latin typeface="Calibri"/>
               </a:rPr>
               <a:t>12 / 19</a:t>
             </a:r>
@@ -6396,7 +6341,7 @@
                 <a:solidFill>
                   <a:srgbClr val="34322F"/>
                 </a:solidFill>
-                <a:latin typeface="Karla"/>
+                <a:latin typeface="Calibri"/>
               </a:rPr>
               <a:t>QUESTION THE HEADLINE  ·  LESSON 1 OF 5</a:t>
             </a:r>
@@ -6451,7 +6396,7 @@
                 <a:solidFill>
                   <a:srgbClr val="FFFDF7"/>
                 </a:solidFill>
-                <a:latin typeface="Karla"/>
+                <a:latin typeface="Calibri"/>
               </a:rPr>
               <a:t>ROUND 4 OF 4</a:t>
             </a:r>
@@ -6538,7 +6483,7 @@
                 <a:solidFill>
                   <a:srgbClr val="FFFDF7"/>
                 </a:solidFill>
-                <a:latin typeface="Karla"/>
+                <a:latin typeface="Calibri"/>
               </a:rPr>
               <a:t>EVIDENCE D</a:t>
             </a:r>
@@ -6665,11 +6610,11 @@
               </a:spcAft>
             </a:pPr>
             <a:r>
-              <a:rPr sz="2200" b="1" i="0">
+              <a:rPr sz="2200" b="0" i="0">
                 <a:solidFill>
                   <a:srgbClr val="262422"/>
                 </a:solidFill>
-                <a:latin typeface="Libre Caslon Display"/>
+                <a:latin typeface="Georgia"/>
               </a:rPr>
               <a:t>Fifty years later</a:t>
             </a:r>
@@ -6755,7 +6700,7 @@
                 <a:solidFill>
                   <a:srgbClr val="8C877D"/>
                 </a:solidFill>
-                <a:latin typeface="Karla"/>
+                <a:latin typeface="Calibri"/>
               </a:rPr>
               <a:t>Source: Kearns, Schmidt and Glantz, JAMA Internal Medicine, 2016</a:t>
             </a:r>
@@ -6798,7 +6743,7 @@
                 <a:solidFill>
                   <a:srgbClr val="34322F"/>
                 </a:solidFill>
-                <a:latin typeface="Karla"/>
+                <a:latin typeface="Calibri"/>
               </a:rPr>
               <a:t>Read it as a group. Fill in the card D row on your evidence sheet, then move on the line.</a:t>
             </a:r>
@@ -6866,7 +6811,7 @@
                 <a:solidFill>
                   <a:srgbClr val="8C877D"/>
                 </a:solidFill>
-                <a:latin typeface="Karla"/>
+                <a:latin typeface="Calibri"/>
               </a:rPr>
               <a:t>The Pastoral Guide</a:t>
             </a:r>
@@ -6909,7 +6854,7 @@
                 <a:solidFill>
                   <a:srgbClr val="8C877D"/>
                 </a:solidFill>
-                <a:latin typeface="Karla"/>
+                <a:latin typeface="Calibri"/>
               </a:rPr>
               <a:t>13 / 19</a:t>
             </a:r>
@@ -7014,7 +6959,7 @@
                 <a:solidFill>
                   <a:srgbClr val="34322F"/>
                 </a:solidFill>
-                <a:latin typeface="Karla"/>
+                <a:latin typeface="Calibri"/>
               </a:rPr>
               <a:t>QUESTION THE HEADLINE  ·  LESSON 1 OF 5</a:t>
             </a:r>
@@ -7023,19 +6968,147 @@
       </p:sp>
       <p:sp>
         <p:nvSpPr>
-          <p:cNvPr id="4" name="Rounded Rectangle 3"/>
+          <p:cNvPr id="5" name="TextBox 4"/>
+          <p:cNvSpPr txBox="1"/>
+          <p:nvPr/>
+        </p:nvSpPr>
+        <p:spPr>
+          <a:xfrm>
+            <a:off x="685800" y="566928"/>
+            <a:ext cx="7772400" cy="434848"/>
+          </a:xfrm>
+          <a:prstGeom prst="rect">
+            <a:avLst/>
+          </a:prstGeom>
+          <a:noFill/>
+          <a:effectLst/>
+        </p:spPr>
+        <p:txBody>
+          <a:bodyPr wrap="square" anchor="t" lIns="0" rIns="0" tIns="0" bIns="0">
+            <a:spAutoFit/>
+          </a:bodyPr>
+          <a:lstStyle/>
+          <a:p>
+            <a:pPr algn="l">
+              <a:lnSpc>
+                <a:spcPct val="105000"/>
+              </a:lnSpc>
+              <a:spcAft>
+                <a:spcPts val="0"/>
+              </a:spcAft>
+            </a:pPr>
+            <a:r>
+              <a:rPr sz="2800" b="0" i="0">
+                <a:solidFill>
+                  <a:srgbClr val="262422"/>
+                </a:solidFill>
+                <a:latin typeface="Georgia"/>
+              </a:rPr>
+              <a:t>Write the real front page</a:t>
+            </a:r>
+          </a:p>
+        </p:txBody>
+      </p:sp>
+      <p:sp>
+        <p:nvSpPr>
+          <p:cNvPr id="6" name="TextBox 5"/>
+          <p:cNvSpPr txBox="1"/>
+          <p:nvPr/>
+        </p:nvSpPr>
+        <p:spPr>
+          <a:xfrm>
+            <a:off x="685800" y="1115568"/>
+            <a:ext cx="7772400" cy="274320"/>
+          </a:xfrm>
+          <a:prstGeom prst="rect">
+            <a:avLst/>
+          </a:prstGeom>
+          <a:noFill/>
+          <a:effectLst/>
+        </p:spPr>
+        <p:txBody>
+          <a:bodyPr wrap="square" anchor="t" lIns="0" rIns="0" tIns="0" bIns="0">
+            <a:spAutoFit/>
+          </a:bodyPr>
+          <a:lstStyle/>
+          <a:p>
+            <a:pPr algn="l">
+              <a:lnSpc>
+                <a:spcPct val="125000"/>
+              </a:lnSpc>
+              <a:spcAft>
+                <a:spcPts val="0"/>
+              </a:spcAft>
+            </a:pPr>
+            <a:r>
+              <a:rPr sz="1300" b="0" i="0">
+                <a:solidFill>
+                  <a:srgbClr val="56524B"/>
+                </a:solidFill>
+                <a:latin typeface="Calibri"/>
+              </a:rPr>
+              <a:t>On your front page sheet, on your own or with one partner.</a:t>
+            </a:r>
+          </a:p>
+        </p:txBody>
+      </p:sp>
+      <p:sp>
+        <p:nvSpPr>
+          <p:cNvPr id="7" name="Rectangle 6"/>
           <p:cNvSpPr/>
           <p:nvPr/>
         </p:nvSpPr>
         <p:spPr>
           <a:xfrm>
-            <a:off x="7280579" y="246888"/>
-            <a:ext cx="1177620" cy="237744"/>
-          </a:xfrm>
-          <a:prstGeom prst="roundRect">
-            <a:avLst>
-              <a:gd name="adj" fmla="val 50000"/>
-            </a:avLst>
+            <a:off x="685800" y="1499616"/>
+            <a:ext cx="7772400" cy="676656"/>
+          </a:xfrm>
+          <a:prstGeom prst="rect">
+            <a:avLst/>
+          </a:prstGeom>
+          <a:solidFill>
+            <a:srgbClr val="FFFDF7"/>
+          </a:solidFill>
+          <a:ln>
+            <a:noFill/>
+          </a:ln>
+          <a:effectLst/>
+        </p:spPr>
+        <p:style>
+          <a:lnRef idx="1">
+            <a:schemeClr val="accent1"/>
+          </a:lnRef>
+          <a:fillRef idx="3">
+            <a:schemeClr val="accent1"/>
+          </a:fillRef>
+          <a:effectRef idx="0">
+            <a:schemeClr val="accent1"/>
+          </a:effectRef>
+          <a:fontRef idx="minor">
+            <a:schemeClr val="lt1"/>
+          </a:fontRef>
+        </p:style>
+        <p:txBody>
+          <a:bodyPr rtlCol="0" anchor="ctr"/>
+          <a:lstStyle/>
+          <a:p>
+            <a:pPr algn="ctr"/>
+          </a:p>
+        </p:txBody>
+      </p:sp>
+      <p:sp>
+        <p:nvSpPr>
+          <p:cNvPr id="8" name="Oval 7"/>
+          <p:cNvSpPr/>
+          <p:nvPr/>
+        </p:nvSpPr>
+        <p:spPr>
+          <a:xfrm>
+            <a:off x="868680" y="1636775"/>
+            <a:ext cx="402336" cy="402336"/>
+          </a:xfrm>
+          <a:prstGeom prst="ellipse">
+            <a:avLst/>
           </a:prstGeom>
           <a:solidFill>
             <a:srgbClr val="34322F"/>
@@ -7060,32 +7133,66 @@
           </a:fontRef>
         </p:style>
         <p:txBody>
-          <a:bodyPr rtlCol="0" anchor="ctr" wrap="none" lIns="0" rIns="0" tIns="0" bIns="0"/>
+          <a:bodyPr rtlCol="0" anchor="ctr"/>
           <a:lstStyle/>
           <a:p>
             <a:pPr algn="ctr"/>
-            <a:r>
-              <a:rPr sz="950" b="1" spc="90">
+          </a:p>
+        </p:txBody>
+      </p:sp>
+      <p:sp>
+        <p:nvSpPr>
+          <p:cNvPr id="9" name="TextBox 8"/>
+          <p:cNvSpPr txBox="1"/>
+          <p:nvPr/>
+        </p:nvSpPr>
+        <p:spPr>
+          <a:xfrm>
+            <a:off x="868680" y="1732787"/>
+            <a:ext cx="402336" cy="219456"/>
+          </a:xfrm>
+          <a:prstGeom prst="rect">
+            <a:avLst/>
+          </a:prstGeom>
+          <a:noFill/>
+          <a:effectLst/>
+        </p:spPr>
+        <p:txBody>
+          <a:bodyPr wrap="square" anchor="t" lIns="0" rIns="0" tIns="0" bIns="0">
+            <a:spAutoFit/>
+          </a:bodyPr>
+          <a:lstStyle/>
+          <a:p>
+            <a:pPr algn="ctr">
+              <a:lnSpc>
+                <a:spcPct val="125000"/>
+              </a:lnSpc>
+              <a:spcAft>
+                <a:spcPts val="0"/>
+              </a:spcAft>
+            </a:pPr>
+            <a:r>
+              <a:rPr sz="1150" b="1" i="0">
                 <a:solidFill>
                   <a:srgbClr val="FFFDF7"/>
                 </a:solidFill>
-                <a:latin typeface="Karla"/>
-              </a:rPr>
-              <a:t>YOUR TURN</a:t>
-            </a:r>
-          </a:p>
-        </p:txBody>
-      </p:sp>
-      <p:sp>
-        <p:nvSpPr>
-          <p:cNvPr id="5" name="TextBox 4"/>
-          <p:cNvSpPr txBox="1"/>
-          <p:nvPr/>
-        </p:nvSpPr>
-        <p:spPr>
-          <a:xfrm>
-            <a:off x="685800" y="566928"/>
-            <a:ext cx="7772400" cy="434848"/>
+                <a:latin typeface="Calibri"/>
+              </a:rPr>
+              <a:t>1</a:t>
+            </a:r>
+          </a:p>
+        </p:txBody>
+      </p:sp>
+      <p:sp>
+        <p:nvSpPr>
+          <p:cNvPr id="10" name="TextBox 9"/>
+          <p:cNvSpPr txBox="1"/>
+          <p:nvPr/>
+        </p:nvSpPr>
+        <p:spPr>
+          <a:xfrm>
+            <a:off x="1417320" y="1600200"/>
+            <a:ext cx="6821424" cy="237744"/>
           </a:xfrm>
           <a:prstGeom prst="rect">
             <a:avLst/>
@@ -7101,34 +7208,34 @@
           <a:p>
             <a:pPr algn="l">
               <a:lnSpc>
-                <a:spcPct val="105000"/>
-              </a:lnSpc>
-              <a:spcAft>
-                <a:spcPts val="0"/>
-              </a:spcAft>
-            </a:pPr>
-            <a:r>
-              <a:rPr sz="2800" b="1" i="0">
-                <a:solidFill>
-                  <a:srgbClr val="262422"/>
-                </a:solidFill>
-                <a:latin typeface="Libre Caslon Display"/>
-              </a:rPr>
-              <a:t>Write the real front page</a:t>
-            </a:r>
-          </a:p>
-        </p:txBody>
-      </p:sp>
-      <p:sp>
-        <p:nvSpPr>
-          <p:cNvPr id="6" name="TextBox 5"/>
-          <p:cNvSpPr txBox="1"/>
-          <p:nvPr/>
-        </p:nvSpPr>
-        <p:spPr>
-          <a:xfrm>
-            <a:off x="685800" y="1115568"/>
-            <a:ext cx="7772400" cy="274320"/>
+                <a:spcPct val="125000"/>
+              </a:lnSpc>
+              <a:spcAft>
+                <a:spcPts val="0"/>
+              </a:spcAft>
+            </a:pPr>
+            <a:r>
+              <a:rPr sz="1300" b="0" i="0">
+                <a:solidFill>
+                  <a:srgbClr val="34322F"/>
+                </a:solidFill>
+                <a:latin typeface="Georgia"/>
+              </a:rPr>
+              <a:t>A headline that is true to the evidence</a:t>
+            </a:r>
+          </a:p>
+        </p:txBody>
+      </p:sp>
+      <p:sp>
+        <p:nvSpPr>
+          <p:cNvPr id="11" name="TextBox 10"/>
+          <p:cNvSpPr txBox="1"/>
+          <p:nvPr/>
+        </p:nvSpPr>
+        <p:spPr>
+          <a:xfrm>
+            <a:off x="1417320" y="1847088"/>
+            <a:ext cx="6821424" cy="256031"/>
           </a:xfrm>
           <a:prstGeom prst="rect">
             <a:avLst/>
@@ -7151,26 +7258,26 @@
               </a:spcAft>
             </a:pPr>
             <a:r>
-              <a:rPr sz="1300" b="0" i="0">
+              <a:rPr sz="1100" b="0" i="0">
                 <a:solidFill>
                   <a:srgbClr val="56524B"/>
                 </a:solidFill>
-                <a:latin typeface="Karla"/>
-              </a:rPr>
-              <a:t>On your front page sheet, on your own or with one partner.</a:t>
-            </a:r>
-          </a:p>
-        </p:txBody>
-      </p:sp>
-      <p:sp>
-        <p:nvSpPr>
-          <p:cNvPr id="7" name="Rectangle 6"/>
+                <a:latin typeface="Calibri"/>
+              </a:rPr>
+              <a:t>No bigger than the evidence. If you are not sure, the headline can say so.</a:t>
+            </a:r>
+          </a:p>
+        </p:txBody>
+      </p:sp>
+      <p:sp>
+        <p:nvSpPr>
+          <p:cNvPr id="12" name="Rectangle 11"/>
           <p:cNvSpPr/>
           <p:nvPr/>
         </p:nvSpPr>
         <p:spPr>
           <a:xfrm>
-            <a:off x="685800" y="1499616"/>
+            <a:off x="685800" y="2304288"/>
             <a:ext cx="7772400" cy="676656"/>
           </a:xfrm>
           <a:prstGeom prst="rect">
@@ -7208,13 +7315,13 @@
       </p:sp>
       <p:sp>
         <p:nvSpPr>
-          <p:cNvPr id="8" name="Oval 7"/>
+          <p:cNvPr id="13" name="Oval 12"/>
           <p:cNvSpPr/>
           <p:nvPr/>
         </p:nvSpPr>
         <p:spPr>
           <a:xfrm>
-            <a:off x="868680" y="1636775"/>
+            <a:off x="868680" y="2441448"/>
             <a:ext cx="402336" cy="402336"/>
           </a:xfrm>
           <a:prstGeom prst="ellipse">
@@ -7252,13 +7359,13 @@
       </p:sp>
       <p:sp>
         <p:nvSpPr>
-          <p:cNvPr id="9" name="TextBox 8"/>
-          <p:cNvSpPr txBox="1"/>
-          <p:nvPr/>
-        </p:nvSpPr>
-        <p:spPr>
-          <a:xfrm>
-            <a:off x="868680" y="1732787"/>
+          <p:cNvPr id="14" name="TextBox 13"/>
+          <p:cNvSpPr txBox="1"/>
+          <p:nvPr/>
+        </p:nvSpPr>
+        <p:spPr>
+          <a:xfrm>
+            <a:off x="868680" y="2537460"/>
             <a:ext cx="402336" cy="219456"/>
           </a:xfrm>
           <a:prstGeom prst="rect">
@@ -7286,22 +7393,22 @@
                 <a:solidFill>
                   <a:srgbClr val="FFFDF7"/>
                 </a:solidFill>
-                <a:latin typeface="Karla"/>
-              </a:rPr>
-              <a:t>1</a:t>
-            </a:r>
-          </a:p>
-        </p:txBody>
-      </p:sp>
-      <p:sp>
-        <p:nvSpPr>
-          <p:cNvPr id="10" name="TextBox 9"/>
-          <p:cNvSpPr txBox="1"/>
-          <p:nvPr/>
-        </p:nvSpPr>
-        <p:spPr>
-          <a:xfrm>
-            <a:off x="1417320" y="1600200"/>
+                <a:latin typeface="Calibri"/>
+              </a:rPr>
+              <a:t>2</a:t>
+            </a:r>
+          </a:p>
+        </p:txBody>
+      </p:sp>
+      <p:sp>
+        <p:nvSpPr>
+          <p:cNvPr id="15" name="TextBox 14"/>
+          <p:cNvSpPr txBox="1"/>
+          <p:nvPr/>
+        </p:nvSpPr>
+        <p:spPr>
+          <a:xfrm>
+            <a:off x="1417320" y="2404872"/>
             <a:ext cx="6821424" cy="237744"/>
           </a:xfrm>
           <a:prstGeom prst="rect">
@@ -7325,26 +7432,26 @@
               </a:spcAft>
             </a:pPr>
             <a:r>
-              <a:rPr sz="1300" b="1" i="0">
+              <a:rPr sz="1300" b="0" i="0">
                 <a:solidFill>
                   <a:srgbClr val="34322F"/>
                 </a:solidFill>
-                <a:latin typeface="Libre Caslon Display"/>
-              </a:rPr>
-              <a:t>A headline that is true to the evidence</a:t>
-            </a:r>
-          </a:p>
-        </p:txBody>
-      </p:sp>
-      <p:sp>
-        <p:nvSpPr>
-          <p:cNvPr id="11" name="TextBox 10"/>
-          <p:cNvSpPr txBox="1"/>
-          <p:nvPr/>
-        </p:nvSpPr>
-        <p:spPr>
-          <a:xfrm>
-            <a:off x="1417320" y="1847088"/>
+                <a:latin typeface="Georgia"/>
+              </a:rPr>
+              <a:t>One line under it that sums up the story</a:t>
+            </a:r>
+          </a:p>
+        </p:txBody>
+      </p:sp>
+      <p:sp>
+        <p:nvSpPr>
+          <p:cNvPr id="16" name="TextBox 15"/>
+          <p:cNvSpPr txBox="1"/>
+          <p:nvPr/>
+        </p:nvSpPr>
+        <p:spPr>
+          <a:xfrm>
+            <a:off x="1417320" y="2651760"/>
             <a:ext cx="6821424" cy="256031"/>
           </a:xfrm>
           <a:prstGeom prst="rect">
@@ -7372,22 +7479,22 @@
                 <a:solidFill>
                   <a:srgbClr val="56524B"/>
                 </a:solidFill>
-                <a:latin typeface="Karla"/>
-              </a:rPr>
-              <a:t>No bigger than the evidence. If you are not sure, the headline can say so.</a:t>
-            </a:r>
-          </a:p>
-        </p:txBody>
-      </p:sp>
-      <p:sp>
-        <p:nvSpPr>
-          <p:cNvPr id="12" name="Rectangle 11"/>
+                <a:latin typeface="Calibri"/>
+              </a:rPr>
+              <a:t>Who made the claim, and what they stood to gain.</a:t>
+            </a:r>
+          </a:p>
+        </p:txBody>
+      </p:sp>
+      <p:sp>
+        <p:nvSpPr>
+          <p:cNvPr id="17" name="Rectangle 16"/>
           <p:cNvSpPr/>
           <p:nvPr/>
         </p:nvSpPr>
         <p:spPr>
           <a:xfrm>
-            <a:off x="685800" y="2304288"/>
+            <a:off x="685800" y="3108960"/>
             <a:ext cx="7772400" cy="676656"/>
           </a:xfrm>
           <a:prstGeom prst="rect">
@@ -7425,13 +7532,13 @@
       </p:sp>
       <p:sp>
         <p:nvSpPr>
-          <p:cNvPr id="13" name="Oval 12"/>
+          <p:cNvPr id="18" name="Oval 17"/>
           <p:cNvSpPr/>
           <p:nvPr/>
         </p:nvSpPr>
         <p:spPr>
           <a:xfrm>
-            <a:off x="868680" y="2441448"/>
+            <a:off x="868680" y="3246120"/>
             <a:ext cx="402336" cy="402336"/>
           </a:xfrm>
           <a:prstGeom prst="ellipse">
@@ -7469,223 +7576,6 @@
       </p:sp>
       <p:sp>
         <p:nvSpPr>
-          <p:cNvPr id="14" name="TextBox 13"/>
-          <p:cNvSpPr txBox="1"/>
-          <p:nvPr/>
-        </p:nvSpPr>
-        <p:spPr>
-          <a:xfrm>
-            <a:off x="868680" y="2537460"/>
-            <a:ext cx="402336" cy="219456"/>
-          </a:xfrm>
-          <a:prstGeom prst="rect">
-            <a:avLst/>
-          </a:prstGeom>
-          <a:noFill/>
-          <a:effectLst/>
-        </p:spPr>
-        <p:txBody>
-          <a:bodyPr wrap="square" anchor="t" lIns="0" rIns="0" tIns="0" bIns="0">
-            <a:spAutoFit/>
-          </a:bodyPr>
-          <a:lstStyle/>
-          <a:p>
-            <a:pPr algn="ctr">
-              <a:lnSpc>
-                <a:spcPct val="125000"/>
-              </a:lnSpc>
-              <a:spcAft>
-                <a:spcPts val="0"/>
-              </a:spcAft>
-            </a:pPr>
-            <a:r>
-              <a:rPr sz="1150" b="1" i="0">
-                <a:solidFill>
-                  <a:srgbClr val="FFFDF7"/>
-                </a:solidFill>
-                <a:latin typeface="Karla"/>
-              </a:rPr>
-              <a:t>2</a:t>
-            </a:r>
-          </a:p>
-        </p:txBody>
-      </p:sp>
-      <p:sp>
-        <p:nvSpPr>
-          <p:cNvPr id="15" name="TextBox 14"/>
-          <p:cNvSpPr txBox="1"/>
-          <p:nvPr/>
-        </p:nvSpPr>
-        <p:spPr>
-          <a:xfrm>
-            <a:off x="1417320" y="2404872"/>
-            <a:ext cx="6821424" cy="237744"/>
-          </a:xfrm>
-          <a:prstGeom prst="rect">
-            <a:avLst/>
-          </a:prstGeom>
-          <a:noFill/>
-          <a:effectLst/>
-        </p:spPr>
-        <p:txBody>
-          <a:bodyPr wrap="square" anchor="t" lIns="0" rIns="0" tIns="0" bIns="0">
-            <a:spAutoFit/>
-          </a:bodyPr>
-          <a:lstStyle/>
-          <a:p>
-            <a:pPr algn="l">
-              <a:lnSpc>
-                <a:spcPct val="125000"/>
-              </a:lnSpc>
-              <a:spcAft>
-                <a:spcPts val="0"/>
-              </a:spcAft>
-            </a:pPr>
-            <a:r>
-              <a:rPr sz="1300" b="1" i="0">
-                <a:solidFill>
-                  <a:srgbClr val="34322F"/>
-                </a:solidFill>
-                <a:latin typeface="Libre Caslon Display"/>
-              </a:rPr>
-              <a:t>One line under it that sums up the story</a:t>
-            </a:r>
-          </a:p>
-        </p:txBody>
-      </p:sp>
-      <p:sp>
-        <p:nvSpPr>
-          <p:cNvPr id="16" name="TextBox 15"/>
-          <p:cNvSpPr txBox="1"/>
-          <p:nvPr/>
-        </p:nvSpPr>
-        <p:spPr>
-          <a:xfrm>
-            <a:off x="1417320" y="2651760"/>
-            <a:ext cx="6821424" cy="256031"/>
-          </a:xfrm>
-          <a:prstGeom prst="rect">
-            <a:avLst/>
-          </a:prstGeom>
-          <a:noFill/>
-          <a:effectLst/>
-        </p:spPr>
-        <p:txBody>
-          <a:bodyPr wrap="square" anchor="t" lIns="0" rIns="0" tIns="0" bIns="0">
-            <a:spAutoFit/>
-          </a:bodyPr>
-          <a:lstStyle/>
-          <a:p>
-            <a:pPr algn="l">
-              <a:lnSpc>
-                <a:spcPct val="125000"/>
-              </a:lnSpc>
-              <a:spcAft>
-                <a:spcPts val="0"/>
-              </a:spcAft>
-            </a:pPr>
-            <a:r>
-              <a:rPr sz="1100" b="0" i="0">
-                <a:solidFill>
-                  <a:srgbClr val="56524B"/>
-                </a:solidFill>
-                <a:latin typeface="Karla"/>
-              </a:rPr>
-              <a:t>Who made the claim, and what they stood to gain.</a:t>
-            </a:r>
-          </a:p>
-        </p:txBody>
-      </p:sp>
-      <p:sp>
-        <p:nvSpPr>
-          <p:cNvPr id="17" name="Rectangle 16"/>
-          <p:cNvSpPr/>
-          <p:nvPr/>
-        </p:nvSpPr>
-        <p:spPr>
-          <a:xfrm>
-            <a:off x="685800" y="3108960"/>
-            <a:ext cx="7772400" cy="676656"/>
-          </a:xfrm>
-          <a:prstGeom prst="rect">
-            <a:avLst/>
-          </a:prstGeom>
-          <a:solidFill>
-            <a:srgbClr val="FFFDF7"/>
-          </a:solidFill>
-          <a:ln>
-            <a:noFill/>
-          </a:ln>
-          <a:effectLst/>
-        </p:spPr>
-        <p:style>
-          <a:lnRef idx="1">
-            <a:schemeClr val="accent1"/>
-          </a:lnRef>
-          <a:fillRef idx="3">
-            <a:schemeClr val="accent1"/>
-          </a:fillRef>
-          <a:effectRef idx="0">
-            <a:schemeClr val="accent1"/>
-          </a:effectRef>
-          <a:fontRef idx="minor">
-            <a:schemeClr val="lt1"/>
-          </a:fontRef>
-        </p:style>
-        <p:txBody>
-          <a:bodyPr rtlCol="0" anchor="ctr"/>
-          <a:lstStyle/>
-          <a:p>
-            <a:pPr algn="ctr"/>
-          </a:p>
-        </p:txBody>
-      </p:sp>
-      <p:sp>
-        <p:nvSpPr>
-          <p:cNvPr id="18" name="Oval 17"/>
-          <p:cNvSpPr/>
-          <p:nvPr/>
-        </p:nvSpPr>
-        <p:spPr>
-          <a:xfrm>
-            <a:off x="868680" y="3246120"/>
-            <a:ext cx="402336" cy="402336"/>
-          </a:xfrm>
-          <a:prstGeom prst="ellipse">
-            <a:avLst/>
-          </a:prstGeom>
-          <a:solidFill>
-            <a:srgbClr val="34322F"/>
-          </a:solidFill>
-          <a:ln>
-            <a:noFill/>
-          </a:ln>
-          <a:effectLst/>
-        </p:spPr>
-        <p:style>
-          <a:lnRef idx="1">
-            <a:schemeClr val="accent1"/>
-          </a:lnRef>
-          <a:fillRef idx="3">
-            <a:schemeClr val="accent1"/>
-          </a:fillRef>
-          <a:effectRef idx="0">
-            <a:schemeClr val="accent1"/>
-          </a:effectRef>
-          <a:fontRef idx="minor">
-            <a:schemeClr val="lt1"/>
-          </a:fontRef>
-        </p:style>
-        <p:txBody>
-          <a:bodyPr rtlCol="0" anchor="ctr"/>
-          <a:lstStyle/>
-          <a:p>
-            <a:pPr algn="ctr"/>
-          </a:p>
-        </p:txBody>
-      </p:sp>
-      <p:sp>
-        <p:nvSpPr>
           <p:cNvPr id="19" name="TextBox 18"/>
           <p:cNvSpPr txBox="1"/>
           <p:nvPr/>
@@ -7720,7 +7610,7 @@
                 <a:solidFill>
                   <a:srgbClr val="FFFDF7"/>
                 </a:solidFill>
-                <a:latin typeface="Karla"/>
+                <a:latin typeface="Calibri"/>
               </a:rPr>
               <a:t>3</a:t>
             </a:r>
@@ -7759,11 +7649,11 @@
               </a:spcAft>
             </a:pPr>
             <a:r>
-              <a:rPr sz="1300" b="1" i="0">
+              <a:rPr sz="1300" b="0" i="0">
                 <a:solidFill>
                   <a:srgbClr val="34322F"/>
                 </a:solidFill>
-                <a:latin typeface="Libre Caslon Display"/>
+                <a:latin typeface="Georgia"/>
               </a:rPr>
               <a:t>The story, in four or five sentences</a:t>
             </a:r>
@@ -7806,7 +7696,7 @@
                 <a:solidFill>
                   <a:srgbClr val="56524B"/>
                 </a:solidFill>
-                <a:latin typeface="Karla"/>
+                <a:latin typeface="Calibri"/>
               </a:rPr>
               <a:t>Use at least two cards, name each one, and put in one number from your sums.</a:t>
             </a:r>
@@ -7849,7 +7739,7 @@
                 <a:solidFill>
                   <a:srgbClr val="34322F"/>
                 </a:solidFill>
-                <a:latin typeface="Karla"/>
+                <a:latin typeface="Calibri"/>
               </a:rPr>
               <a:t>Your evidence sheet has everything you need. Write it for somebody who has not seen the cards.</a:t>
             </a:r>
@@ -7917,7 +7807,7 @@
                 <a:solidFill>
                   <a:srgbClr val="8C877D"/>
                 </a:solidFill>
-                <a:latin typeface="Karla"/>
+                <a:latin typeface="Calibri"/>
               </a:rPr>
               <a:t>The Pastoral Guide</a:t>
             </a:r>
@@ -7960,7 +7850,7 @@
                 <a:solidFill>
                   <a:srgbClr val="8C877D"/>
                 </a:solidFill>
-                <a:latin typeface="Karla"/>
+                <a:latin typeface="Calibri"/>
               </a:rPr>
               <a:t>14 / 19</a:t>
             </a:r>
@@ -8065,7 +7955,7 @@
                 <a:solidFill>
                   <a:srgbClr val="34322F"/>
                 </a:solidFill>
-                <a:latin typeface="Karla"/>
+                <a:latin typeface="Calibri"/>
               </a:rPr>
               <a:t>QUESTION THE HEADLINE  ·  LESSON 1 OF 5</a:t>
             </a:r>
@@ -8074,19 +7964,147 @@
       </p:sp>
       <p:sp>
         <p:nvSpPr>
-          <p:cNvPr id="4" name="Rounded Rectangle 3"/>
+          <p:cNvPr id="5" name="TextBox 4"/>
+          <p:cNvSpPr txBox="1"/>
+          <p:nvPr/>
+        </p:nvSpPr>
+        <p:spPr>
+          <a:xfrm>
+            <a:off x="685800" y="566928"/>
+            <a:ext cx="7772400" cy="434848"/>
+          </a:xfrm>
+          <a:prstGeom prst="rect">
+            <a:avLst/>
+          </a:prstGeom>
+          <a:noFill/>
+          <a:effectLst/>
+        </p:spPr>
+        <p:txBody>
+          <a:bodyPr wrap="square" anchor="t" lIns="0" rIns="0" tIns="0" bIns="0">
+            <a:spAutoFit/>
+          </a:bodyPr>
+          <a:lstStyle/>
+          <a:p>
+            <a:pPr algn="l">
+              <a:lnSpc>
+                <a:spcPct val="105000"/>
+              </a:lnSpc>
+              <a:spcAft>
+                <a:spcPts val="0"/>
+              </a:spcAft>
+            </a:pPr>
+            <a:r>
+              <a:rPr sz="2800" b="0" i="0">
+                <a:solidFill>
+                  <a:srgbClr val="262422"/>
+                </a:solidFill>
+                <a:latin typeface="Georgia"/>
+              </a:rPr>
+              <a:t>Check somebody else’s page</a:t>
+            </a:r>
+          </a:p>
+        </p:txBody>
+      </p:sp>
+      <p:sp>
+        <p:nvSpPr>
+          <p:cNvPr id="6" name="TextBox 5"/>
+          <p:cNvSpPr txBox="1"/>
+          <p:nvPr/>
+        </p:nvSpPr>
+        <p:spPr>
+          <a:xfrm>
+            <a:off x="685800" y="1152144"/>
+            <a:ext cx="7772400" cy="274320"/>
+          </a:xfrm>
+          <a:prstGeom prst="rect">
+            <a:avLst/>
+          </a:prstGeom>
+          <a:noFill/>
+          <a:effectLst/>
+        </p:spPr>
+        <p:txBody>
+          <a:bodyPr wrap="square" anchor="t" lIns="0" rIns="0" tIns="0" bIns="0">
+            <a:spAutoFit/>
+          </a:bodyPr>
+          <a:lstStyle/>
+          <a:p>
+            <a:pPr algn="l">
+              <a:lnSpc>
+                <a:spcPct val="125000"/>
+              </a:lnSpc>
+              <a:spcAft>
+                <a:spcPts val="0"/>
+              </a:spcAft>
+            </a:pPr>
+            <a:r>
+              <a:rPr sz="1300" b="0" i="0">
+                <a:solidFill>
+                  <a:srgbClr val="56524B"/>
+                </a:solidFill>
+                <a:latin typeface="Calibri"/>
+              </a:rPr>
+              <a:t>Swap front pages with somebody from another group. Tick each box it passes.</a:t>
+            </a:r>
+          </a:p>
+        </p:txBody>
+      </p:sp>
+      <p:sp>
+        <p:nvSpPr>
+          <p:cNvPr id="7" name="Rectangle 6"/>
           <p:cNvSpPr/>
           <p:nvPr/>
         </p:nvSpPr>
         <p:spPr>
           <a:xfrm>
-            <a:off x="7714534" y="246888"/>
-            <a:ext cx="743665" cy="237744"/>
-          </a:xfrm>
-          <a:prstGeom prst="roundRect">
-            <a:avLst>
-              <a:gd name="adj" fmla="val 50000"/>
-            </a:avLst>
+            <a:off x="685800" y="1591056"/>
+            <a:ext cx="7772400" cy="676656"/>
+          </a:xfrm>
+          <a:prstGeom prst="rect">
+            <a:avLst/>
+          </a:prstGeom>
+          <a:solidFill>
+            <a:srgbClr val="FFFDF7"/>
+          </a:solidFill>
+          <a:ln>
+            <a:noFill/>
+          </a:ln>
+          <a:effectLst/>
+        </p:spPr>
+        <p:style>
+          <a:lnRef idx="1">
+            <a:schemeClr val="accent1"/>
+          </a:lnRef>
+          <a:fillRef idx="3">
+            <a:schemeClr val="accent1"/>
+          </a:fillRef>
+          <a:effectRef idx="0">
+            <a:schemeClr val="accent1"/>
+          </a:effectRef>
+          <a:fontRef idx="minor">
+            <a:schemeClr val="lt1"/>
+          </a:fontRef>
+        </p:style>
+        <p:txBody>
+          <a:bodyPr rtlCol="0" anchor="ctr"/>
+          <a:lstStyle/>
+          <a:p>
+            <a:pPr algn="ctr"/>
+          </a:p>
+        </p:txBody>
+      </p:sp>
+      <p:sp>
+        <p:nvSpPr>
+          <p:cNvPr id="8" name="Oval 7"/>
+          <p:cNvSpPr/>
+          <p:nvPr/>
+        </p:nvSpPr>
+        <p:spPr>
+          <a:xfrm>
+            <a:off x="868680" y="1728216"/>
+            <a:ext cx="402336" cy="402336"/>
+          </a:xfrm>
+          <a:prstGeom prst="ellipse">
+            <a:avLst/>
           </a:prstGeom>
           <a:solidFill>
             <a:srgbClr val="34322F"/>
@@ -8111,32 +8129,66 @@
           </a:fontRef>
         </p:style>
         <p:txBody>
-          <a:bodyPr rtlCol="0" anchor="ctr" wrap="none" lIns="0" rIns="0" tIns="0" bIns="0"/>
+          <a:bodyPr rtlCol="0" anchor="ctr"/>
           <a:lstStyle/>
           <a:p>
             <a:pPr algn="ctr"/>
-            <a:r>
-              <a:rPr sz="950" b="1" spc="90">
+          </a:p>
+        </p:txBody>
+      </p:sp>
+      <p:sp>
+        <p:nvSpPr>
+          <p:cNvPr id="9" name="TextBox 8"/>
+          <p:cNvSpPr txBox="1"/>
+          <p:nvPr/>
+        </p:nvSpPr>
+        <p:spPr>
+          <a:xfrm>
+            <a:off x="868680" y="1824228"/>
+            <a:ext cx="402336" cy="219456"/>
+          </a:xfrm>
+          <a:prstGeom prst="rect">
+            <a:avLst/>
+          </a:prstGeom>
+          <a:noFill/>
+          <a:effectLst/>
+        </p:spPr>
+        <p:txBody>
+          <a:bodyPr wrap="square" anchor="t" lIns="0" rIns="0" tIns="0" bIns="0">
+            <a:spAutoFit/>
+          </a:bodyPr>
+          <a:lstStyle/>
+          <a:p>
+            <a:pPr algn="ctr">
+              <a:lnSpc>
+                <a:spcPct val="125000"/>
+              </a:lnSpc>
+              <a:spcAft>
+                <a:spcPts val="0"/>
+              </a:spcAft>
+            </a:pPr>
+            <a:r>
+              <a:rPr sz="1150" b="1" i="0">
                 <a:solidFill>
                   <a:srgbClr val="FFFDF7"/>
                 </a:solidFill>
-                <a:latin typeface="Karla"/>
-              </a:rPr>
-              <a:t>MARK</a:t>
-            </a:r>
-          </a:p>
-        </p:txBody>
-      </p:sp>
-      <p:sp>
-        <p:nvSpPr>
-          <p:cNvPr id="5" name="TextBox 4"/>
-          <p:cNvSpPr txBox="1"/>
-          <p:nvPr/>
-        </p:nvSpPr>
-        <p:spPr>
-          <a:xfrm>
-            <a:off x="685800" y="566928"/>
-            <a:ext cx="7772400" cy="434848"/>
+                <a:latin typeface="Calibri"/>
+              </a:rPr>
+              <a:t>1</a:t>
+            </a:r>
+          </a:p>
+        </p:txBody>
+      </p:sp>
+      <p:sp>
+        <p:nvSpPr>
+          <p:cNvPr id="10" name="TextBox 9"/>
+          <p:cNvSpPr txBox="1"/>
+          <p:nvPr/>
+        </p:nvSpPr>
+        <p:spPr>
+          <a:xfrm>
+            <a:off x="1417320" y="1691640"/>
+            <a:ext cx="6821424" cy="237744"/>
           </a:xfrm>
           <a:prstGeom prst="rect">
             <a:avLst/>
@@ -8152,34 +8204,34 @@
           <a:p>
             <a:pPr algn="l">
               <a:lnSpc>
-                <a:spcPct val="105000"/>
-              </a:lnSpc>
-              <a:spcAft>
-                <a:spcPts val="0"/>
-              </a:spcAft>
-            </a:pPr>
-            <a:r>
-              <a:rPr sz="2800" b="1" i="0">
-                <a:solidFill>
-                  <a:srgbClr val="262422"/>
-                </a:solidFill>
-                <a:latin typeface="Libre Caslon Display"/>
-              </a:rPr>
-              <a:t>Check somebody else’s page</a:t>
-            </a:r>
-          </a:p>
-        </p:txBody>
-      </p:sp>
-      <p:sp>
-        <p:nvSpPr>
-          <p:cNvPr id="6" name="TextBox 5"/>
-          <p:cNvSpPr txBox="1"/>
-          <p:nvPr/>
-        </p:nvSpPr>
-        <p:spPr>
-          <a:xfrm>
-            <a:off x="685800" y="1152144"/>
-            <a:ext cx="7772400" cy="274320"/>
+                <a:spcPct val="125000"/>
+              </a:lnSpc>
+              <a:spcAft>
+                <a:spcPts val="0"/>
+              </a:spcAft>
+            </a:pPr>
+            <a:r>
+              <a:rPr sz="1300" b="0" i="0">
+                <a:solidFill>
+                  <a:srgbClr val="34322F"/>
+                </a:solidFill>
+                <a:latin typeface="Georgia"/>
+              </a:rPr>
+              <a:t>Is the headline true to the evidence?</a:t>
+            </a:r>
+          </a:p>
+        </p:txBody>
+      </p:sp>
+      <p:sp>
+        <p:nvSpPr>
+          <p:cNvPr id="11" name="TextBox 10"/>
+          <p:cNvSpPr txBox="1"/>
+          <p:nvPr/>
+        </p:nvSpPr>
+        <p:spPr>
+          <a:xfrm>
+            <a:off x="1417320" y="1938528"/>
+            <a:ext cx="6821424" cy="256031"/>
           </a:xfrm>
           <a:prstGeom prst="rect">
             <a:avLst/>
@@ -8202,26 +8254,26 @@
               </a:spcAft>
             </a:pPr>
             <a:r>
-              <a:rPr sz="1300" b="0" i="0">
+              <a:rPr sz="1100" b="0" i="0">
                 <a:solidFill>
                   <a:srgbClr val="56524B"/>
                 </a:solidFill>
-                <a:latin typeface="Karla"/>
-              </a:rPr>
-              <a:t>Swap front pages with somebody from another group. Tick each box it passes.</a:t>
-            </a:r>
-          </a:p>
-        </p:txBody>
-      </p:sp>
-      <p:sp>
-        <p:nvSpPr>
-          <p:cNvPr id="7" name="Rectangle 6"/>
+                <a:latin typeface="Calibri"/>
+              </a:rPr>
+              <a:t>Not bigger, not smaller, than what the cards show.</a:t>
+            </a:r>
+          </a:p>
+        </p:txBody>
+      </p:sp>
+      <p:sp>
+        <p:nvSpPr>
+          <p:cNvPr id="12" name="Rectangle 11"/>
           <p:cNvSpPr/>
           <p:nvPr/>
         </p:nvSpPr>
         <p:spPr>
           <a:xfrm>
-            <a:off x="685800" y="1591056"/>
+            <a:off x="685800" y="2414016"/>
             <a:ext cx="7772400" cy="676656"/>
           </a:xfrm>
           <a:prstGeom prst="rect">
@@ -8259,13 +8311,13 @@
       </p:sp>
       <p:sp>
         <p:nvSpPr>
-          <p:cNvPr id="8" name="Oval 7"/>
+          <p:cNvPr id="13" name="Oval 12"/>
           <p:cNvSpPr/>
           <p:nvPr/>
         </p:nvSpPr>
         <p:spPr>
           <a:xfrm>
-            <a:off x="868680" y="1728216"/>
+            <a:off x="868680" y="2551176"/>
             <a:ext cx="402336" cy="402336"/>
           </a:xfrm>
           <a:prstGeom prst="ellipse">
@@ -8303,13 +8355,13 @@
       </p:sp>
       <p:sp>
         <p:nvSpPr>
-          <p:cNvPr id="9" name="TextBox 8"/>
-          <p:cNvSpPr txBox="1"/>
-          <p:nvPr/>
-        </p:nvSpPr>
-        <p:spPr>
-          <a:xfrm>
-            <a:off x="868680" y="1824228"/>
+          <p:cNvPr id="14" name="TextBox 13"/>
+          <p:cNvSpPr txBox="1"/>
+          <p:nvPr/>
+        </p:nvSpPr>
+        <p:spPr>
+          <a:xfrm>
+            <a:off x="868680" y="2647188"/>
             <a:ext cx="402336" cy="219456"/>
           </a:xfrm>
           <a:prstGeom prst="rect">
@@ -8337,22 +8389,22 @@
                 <a:solidFill>
                   <a:srgbClr val="FFFDF7"/>
                 </a:solidFill>
-                <a:latin typeface="Karla"/>
-              </a:rPr>
-              <a:t>1</a:t>
-            </a:r>
-          </a:p>
-        </p:txBody>
-      </p:sp>
-      <p:sp>
-        <p:nvSpPr>
-          <p:cNvPr id="10" name="TextBox 9"/>
-          <p:cNvSpPr txBox="1"/>
-          <p:nvPr/>
-        </p:nvSpPr>
-        <p:spPr>
-          <a:xfrm>
-            <a:off x="1417320" y="1691640"/>
+                <a:latin typeface="Calibri"/>
+              </a:rPr>
+              <a:t>2</a:t>
+            </a:r>
+          </a:p>
+        </p:txBody>
+      </p:sp>
+      <p:sp>
+        <p:nvSpPr>
+          <p:cNvPr id="15" name="TextBox 14"/>
+          <p:cNvSpPr txBox="1"/>
+          <p:nvPr/>
+        </p:nvSpPr>
+        <p:spPr>
+          <a:xfrm>
+            <a:off x="1417320" y="2514600"/>
             <a:ext cx="6821424" cy="237744"/>
           </a:xfrm>
           <a:prstGeom prst="rect">
@@ -8376,26 +8428,26 @@
               </a:spcAft>
             </a:pPr>
             <a:r>
-              <a:rPr sz="1300" b="1" i="0">
+              <a:rPr sz="1300" b="0" i="0">
                 <a:solidFill>
                   <a:srgbClr val="34322F"/>
                 </a:solidFill>
-                <a:latin typeface="Libre Caslon Display"/>
-              </a:rPr>
-              <a:t>Is the headline true to the evidence?</a:t>
-            </a:r>
-          </a:p>
-        </p:txBody>
-      </p:sp>
-      <p:sp>
-        <p:nvSpPr>
-          <p:cNvPr id="11" name="TextBox 10"/>
-          <p:cNvSpPr txBox="1"/>
-          <p:nvPr/>
-        </p:nvSpPr>
-        <p:spPr>
-          <a:xfrm>
-            <a:off x="1417320" y="1938528"/>
+                <a:latin typeface="Georgia"/>
+              </a:rPr>
+              <a:t>Does it say where the evidence came from?</a:t>
+            </a:r>
+          </a:p>
+        </p:txBody>
+      </p:sp>
+      <p:sp>
+        <p:nvSpPr>
+          <p:cNvPr id="16" name="TextBox 15"/>
+          <p:cNvSpPr txBox="1"/>
+          <p:nvPr/>
+        </p:nvSpPr>
+        <p:spPr>
+          <a:xfrm>
+            <a:off x="1417320" y="2761488"/>
             <a:ext cx="6821424" cy="256031"/>
           </a:xfrm>
           <a:prstGeom prst="rect">
@@ -8423,22 +8475,22 @@
                 <a:solidFill>
                   <a:srgbClr val="56524B"/>
                 </a:solidFill>
-                <a:latin typeface="Karla"/>
-              </a:rPr>
-              <a:t>Not bigger, not smaller, than what the cards show.</a:t>
-            </a:r>
-          </a:p>
-        </p:txBody>
-      </p:sp>
-      <p:sp>
-        <p:nvSpPr>
-          <p:cNvPr id="12" name="Rectangle 11"/>
+                <a:latin typeface="Calibri"/>
+              </a:rPr>
+              <a:t>A study, a document, a person with a name.</a:t>
+            </a:r>
+          </a:p>
+        </p:txBody>
+      </p:sp>
+      <p:sp>
+        <p:nvSpPr>
+          <p:cNvPr id="17" name="Rectangle 16"/>
           <p:cNvSpPr/>
           <p:nvPr/>
         </p:nvSpPr>
         <p:spPr>
           <a:xfrm>
-            <a:off x="685800" y="2414016"/>
+            <a:off x="685800" y="3236976"/>
             <a:ext cx="7772400" cy="676656"/>
           </a:xfrm>
           <a:prstGeom prst="rect">
@@ -8476,13 +8528,13 @@
       </p:sp>
       <p:sp>
         <p:nvSpPr>
-          <p:cNvPr id="13" name="Oval 12"/>
+          <p:cNvPr id="18" name="Oval 17"/>
           <p:cNvSpPr/>
           <p:nvPr/>
         </p:nvSpPr>
         <p:spPr>
           <a:xfrm>
-            <a:off x="868680" y="2551176"/>
+            <a:off x="868680" y="3374136"/>
             <a:ext cx="402336" cy="402336"/>
           </a:xfrm>
           <a:prstGeom prst="ellipse">
@@ -8520,223 +8572,6 @@
       </p:sp>
       <p:sp>
         <p:nvSpPr>
-          <p:cNvPr id="14" name="TextBox 13"/>
-          <p:cNvSpPr txBox="1"/>
-          <p:nvPr/>
-        </p:nvSpPr>
-        <p:spPr>
-          <a:xfrm>
-            <a:off x="868680" y="2647188"/>
-            <a:ext cx="402336" cy="219456"/>
-          </a:xfrm>
-          <a:prstGeom prst="rect">
-            <a:avLst/>
-          </a:prstGeom>
-          <a:noFill/>
-          <a:effectLst/>
-        </p:spPr>
-        <p:txBody>
-          <a:bodyPr wrap="square" anchor="t" lIns="0" rIns="0" tIns="0" bIns="0">
-            <a:spAutoFit/>
-          </a:bodyPr>
-          <a:lstStyle/>
-          <a:p>
-            <a:pPr algn="ctr">
-              <a:lnSpc>
-                <a:spcPct val="125000"/>
-              </a:lnSpc>
-              <a:spcAft>
-                <a:spcPts val="0"/>
-              </a:spcAft>
-            </a:pPr>
-            <a:r>
-              <a:rPr sz="1150" b="1" i="0">
-                <a:solidFill>
-                  <a:srgbClr val="FFFDF7"/>
-                </a:solidFill>
-                <a:latin typeface="Karla"/>
-              </a:rPr>
-              <a:t>2</a:t>
-            </a:r>
-          </a:p>
-        </p:txBody>
-      </p:sp>
-      <p:sp>
-        <p:nvSpPr>
-          <p:cNvPr id="15" name="TextBox 14"/>
-          <p:cNvSpPr txBox="1"/>
-          <p:nvPr/>
-        </p:nvSpPr>
-        <p:spPr>
-          <a:xfrm>
-            <a:off x="1417320" y="2514600"/>
-            <a:ext cx="6821424" cy="237744"/>
-          </a:xfrm>
-          <a:prstGeom prst="rect">
-            <a:avLst/>
-          </a:prstGeom>
-          <a:noFill/>
-          <a:effectLst/>
-        </p:spPr>
-        <p:txBody>
-          <a:bodyPr wrap="square" anchor="t" lIns="0" rIns="0" tIns="0" bIns="0">
-            <a:spAutoFit/>
-          </a:bodyPr>
-          <a:lstStyle/>
-          <a:p>
-            <a:pPr algn="l">
-              <a:lnSpc>
-                <a:spcPct val="125000"/>
-              </a:lnSpc>
-              <a:spcAft>
-                <a:spcPts val="0"/>
-              </a:spcAft>
-            </a:pPr>
-            <a:r>
-              <a:rPr sz="1300" b="1" i="0">
-                <a:solidFill>
-                  <a:srgbClr val="34322F"/>
-                </a:solidFill>
-                <a:latin typeface="Libre Caslon Display"/>
-              </a:rPr>
-              <a:t>Does it say where the evidence came from?</a:t>
-            </a:r>
-          </a:p>
-        </p:txBody>
-      </p:sp>
-      <p:sp>
-        <p:nvSpPr>
-          <p:cNvPr id="16" name="TextBox 15"/>
-          <p:cNvSpPr txBox="1"/>
-          <p:nvPr/>
-        </p:nvSpPr>
-        <p:spPr>
-          <a:xfrm>
-            <a:off x="1417320" y="2761488"/>
-            <a:ext cx="6821424" cy="256031"/>
-          </a:xfrm>
-          <a:prstGeom prst="rect">
-            <a:avLst/>
-          </a:prstGeom>
-          <a:noFill/>
-          <a:effectLst/>
-        </p:spPr>
-        <p:txBody>
-          <a:bodyPr wrap="square" anchor="t" lIns="0" rIns="0" tIns="0" bIns="0">
-            <a:spAutoFit/>
-          </a:bodyPr>
-          <a:lstStyle/>
-          <a:p>
-            <a:pPr algn="l">
-              <a:lnSpc>
-                <a:spcPct val="125000"/>
-              </a:lnSpc>
-              <a:spcAft>
-                <a:spcPts val="0"/>
-              </a:spcAft>
-            </a:pPr>
-            <a:r>
-              <a:rPr sz="1100" b="0" i="0">
-                <a:solidFill>
-                  <a:srgbClr val="56524B"/>
-                </a:solidFill>
-                <a:latin typeface="Karla"/>
-              </a:rPr>
-              <a:t>A study, a document, a person with a name.</a:t>
-            </a:r>
-          </a:p>
-        </p:txBody>
-      </p:sp>
-      <p:sp>
-        <p:nvSpPr>
-          <p:cNvPr id="17" name="Rectangle 16"/>
-          <p:cNvSpPr/>
-          <p:nvPr/>
-        </p:nvSpPr>
-        <p:spPr>
-          <a:xfrm>
-            <a:off x="685800" y="3236976"/>
-            <a:ext cx="7772400" cy="676656"/>
-          </a:xfrm>
-          <a:prstGeom prst="rect">
-            <a:avLst/>
-          </a:prstGeom>
-          <a:solidFill>
-            <a:srgbClr val="FFFDF7"/>
-          </a:solidFill>
-          <a:ln>
-            <a:noFill/>
-          </a:ln>
-          <a:effectLst/>
-        </p:spPr>
-        <p:style>
-          <a:lnRef idx="1">
-            <a:schemeClr val="accent1"/>
-          </a:lnRef>
-          <a:fillRef idx="3">
-            <a:schemeClr val="accent1"/>
-          </a:fillRef>
-          <a:effectRef idx="0">
-            <a:schemeClr val="accent1"/>
-          </a:effectRef>
-          <a:fontRef idx="minor">
-            <a:schemeClr val="lt1"/>
-          </a:fontRef>
-        </p:style>
-        <p:txBody>
-          <a:bodyPr rtlCol="0" anchor="ctr"/>
-          <a:lstStyle/>
-          <a:p>
-            <a:pPr algn="ctr"/>
-          </a:p>
-        </p:txBody>
-      </p:sp>
-      <p:sp>
-        <p:nvSpPr>
-          <p:cNvPr id="18" name="Oval 17"/>
-          <p:cNvSpPr/>
-          <p:nvPr/>
-        </p:nvSpPr>
-        <p:spPr>
-          <a:xfrm>
-            <a:off x="868680" y="3374136"/>
-            <a:ext cx="402336" cy="402336"/>
-          </a:xfrm>
-          <a:prstGeom prst="ellipse">
-            <a:avLst/>
-          </a:prstGeom>
-          <a:solidFill>
-            <a:srgbClr val="34322F"/>
-          </a:solidFill>
-          <a:ln>
-            <a:noFill/>
-          </a:ln>
-          <a:effectLst/>
-        </p:spPr>
-        <p:style>
-          <a:lnRef idx="1">
-            <a:schemeClr val="accent1"/>
-          </a:lnRef>
-          <a:fillRef idx="3">
-            <a:schemeClr val="accent1"/>
-          </a:fillRef>
-          <a:effectRef idx="0">
-            <a:schemeClr val="accent1"/>
-          </a:effectRef>
-          <a:fontRef idx="minor">
-            <a:schemeClr val="lt1"/>
-          </a:fontRef>
-        </p:style>
-        <p:txBody>
-          <a:bodyPr rtlCol="0" anchor="ctr"/>
-          <a:lstStyle/>
-          <a:p>
-            <a:pPr algn="ctr"/>
-          </a:p>
-        </p:txBody>
-      </p:sp>
-      <p:sp>
-        <p:nvSpPr>
           <p:cNvPr id="19" name="TextBox 18"/>
           <p:cNvSpPr txBox="1"/>
           <p:nvPr/>
@@ -8771,7 +8606,7 @@
                 <a:solidFill>
                   <a:srgbClr val="FFFDF7"/>
                 </a:solidFill>
-                <a:latin typeface="Karla"/>
+                <a:latin typeface="Calibri"/>
               </a:rPr>
               <a:t>3</a:t>
             </a:r>
@@ -8810,11 +8645,11 @@
               </a:spcAft>
             </a:pPr>
             <a:r>
-              <a:rPr sz="1300" b="1" i="0">
+              <a:rPr sz="1300" b="0" i="0">
                 <a:solidFill>
                   <a:srgbClr val="34322F"/>
                 </a:solidFill>
-                <a:latin typeface="Libre Caslon Display"/>
+                <a:latin typeface="Georgia"/>
               </a:rPr>
               <a:t>Would it survive the five questions?</a:t>
             </a:r>
@@ -8857,7 +8692,7 @@
                 <a:solidFill>
                   <a:srgbClr val="56524B"/>
                 </a:solidFill>
-                <a:latin typeface="Karla"/>
+                <a:latin typeface="Calibri"/>
               </a:rPr>
               <a:t>Try one or two of them on it.</a:t>
             </a:r>
@@ -8900,7 +8735,7 @@
                 <a:solidFill>
                   <a:srgbClr val="34322F"/>
                 </a:solidFill>
-                <a:latin typeface="Karla"/>
+                <a:latin typeface="Calibri"/>
               </a:rPr>
               <a:t>Write one change that would make it better, then hand it back.</a:t>
             </a:r>
@@ -8968,7 +8803,7 @@
                 <a:solidFill>
                   <a:srgbClr val="8C877D"/>
                 </a:solidFill>
-                <a:latin typeface="Karla"/>
+                <a:latin typeface="Calibri"/>
               </a:rPr>
               <a:t>The Pastoral Guide</a:t>
             </a:r>
@@ -9011,7 +8846,7 @@
                 <a:solidFill>
                   <a:srgbClr val="8C877D"/>
                 </a:solidFill>
-                <a:latin typeface="Karla"/>
+                <a:latin typeface="Calibri"/>
               </a:rPr>
               <a:t>15 / 19</a:t>
             </a:r>
@@ -9116,7 +8951,7 @@
                 <a:solidFill>
                   <a:srgbClr val="34322F"/>
                 </a:solidFill>
-                <a:latin typeface="Karla"/>
+                <a:latin typeface="Calibri"/>
               </a:rPr>
               <a:t>QUESTION THE HEADLINE  ·  LESSON 1 OF 5</a:t>
             </a:r>
@@ -9155,11 +8990,11 @@
               </a:spcAft>
             </a:pPr>
             <a:r>
-              <a:rPr sz="2800" b="1" i="0">
+              <a:rPr sz="2800" b="0" i="0">
                 <a:solidFill>
                   <a:srgbClr val="262422"/>
                 </a:solidFill>
-                <a:latin typeface="Libre Caslon Display"/>
+                <a:latin typeface="Georgia"/>
               </a:rPr>
               <a:t>What really happened</a:t>
             </a:r>
@@ -9260,7 +9095,7 @@
                 <a:solidFill>
                   <a:srgbClr val="34322F"/>
                 </a:solidFill>
-                <a:latin typeface="Karla"/>
+                <a:latin typeface="Calibri"/>
               </a:rPr>
               <a:t>BUSTED</a:t>
             </a:r>
@@ -9299,11 +9134,11 @@
               </a:spcAft>
             </a:pPr>
             <a:r>
-              <a:rPr sz="1500" b="1" i="0">
+              <a:rPr sz="1500" b="0" i="0">
                 <a:solidFill>
                   <a:srgbClr val="34322F"/>
                 </a:solidFill>
-                <a:latin typeface="Libre Caslon Display"/>
+                <a:latin typeface="Georgia"/>
               </a:rPr>
               <a:t>1965</a:t>
             </a:r>
@@ -9390,7 +9225,7 @@
                 <a:solidFill>
                   <a:srgbClr val="262422"/>
                 </a:solidFill>
-                <a:latin typeface="Karla"/>
+                <a:latin typeface="Calibri"/>
               </a:rPr>
               <a:t>The sugar industry pays for a review of the studies that blamed sugar.</a:t>
             </a:r>
@@ -9429,11 +9264,11 @@
               </a:spcAft>
             </a:pPr>
             <a:r>
-              <a:rPr sz="1500" b="1" i="0">
+              <a:rPr sz="1500" b="0" i="0">
                 <a:solidFill>
                   <a:srgbClr val="34322F"/>
                 </a:solidFill>
-                <a:latin typeface="Libre Caslon Display"/>
+                <a:latin typeface="Georgia"/>
               </a:rPr>
               <a:t>1967</a:t>
             </a:r>
@@ -9520,7 +9355,7 @@
                 <a:solidFill>
                   <a:srgbClr val="262422"/>
                 </a:solidFill>
-                <a:latin typeface="Karla"/>
+                <a:latin typeface="Calibri"/>
               </a:rPr>
               <a:t>The review blames fat and does not mention the sugar industry’s money.</a:t>
             </a:r>
@@ -9559,11 +9394,11 @@
               </a:spcAft>
             </a:pPr>
             <a:r>
-              <a:rPr sz="1500" b="1" i="0">
+              <a:rPr sz="1500" b="0" i="0">
                 <a:solidFill>
                   <a:srgbClr val="34322F"/>
                 </a:solidFill>
-                <a:latin typeface="Libre Caslon Display"/>
+                <a:latin typeface="Georgia"/>
               </a:rPr>
               <a:t>1984</a:t>
             </a:r>
@@ -9650,7 +9485,7 @@
                 <a:solidFill>
                   <a:srgbClr val="262422"/>
                 </a:solidFill>
-                <a:latin typeface="Karla"/>
+                <a:latin typeface="Calibri"/>
               </a:rPr>
               <a:t>The journal starts asking authors to say who pays them.</a:t>
             </a:r>
@@ -9689,11 +9524,11 @@
               </a:spcAft>
             </a:pPr>
             <a:r>
-              <a:rPr sz="1500" b="1" i="0">
+              <a:rPr sz="1500" b="0" i="0">
                 <a:solidFill>
                   <a:srgbClr val="34322F"/>
                 </a:solidFill>
-                <a:latin typeface="Libre Caslon Display"/>
+                <a:latin typeface="Georgia"/>
               </a:rPr>
               <a:t>2016</a:t>
             </a:r>
@@ -9780,7 +9615,7 @@
                 <a:solidFill>
                   <a:srgbClr val="262422"/>
                 </a:solidFill>
-                <a:latin typeface="Karla"/>
+                <a:latin typeface="Calibri"/>
               </a:rPr>
               <a:t>The letters are found and published.</a:t>
             </a:r>
@@ -9867,7 +9702,7 @@
                 <a:solidFill>
                   <a:srgbClr val="D7D2C8"/>
                 </a:solidFill>
-                <a:latin typeface="Karla"/>
+                <a:latin typeface="Calibri"/>
               </a:rPr>
               <a:t>THE QUESTION THAT WOULD HAVE CAUGHT IT</a:t>
             </a:r>
@@ -9906,11 +9741,11 @@
               </a:spcAft>
             </a:pPr>
             <a:r>
-              <a:rPr sz="1800" b="1" i="0">
+              <a:rPr sz="1800" b="0" i="0">
                 <a:solidFill>
                   <a:srgbClr val="FFFDF7"/>
                 </a:solidFill>
-                <a:latin typeface="Libre Caslon Display"/>
+                <a:latin typeface="Georgia"/>
               </a:rPr>
               <a:t>Who paid for it?</a:t>
             </a:r>
@@ -9978,7 +9813,7 @@
                 <a:solidFill>
                   <a:srgbClr val="8C877D"/>
                 </a:solidFill>
-                <a:latin typeface="Karla"/>
+                <a:latin typeface="Calibri"/>
               </a:rPr>
               <a:t>The Pastoral Guide</a:t>
             </a:r>
@@ -10021,7 +9856,7 @@
                 <a:solidFill>
                   <a:srgbClr val="8C877D"/>
                 </a:solidFill>
-                <a:latin typeface="Karla"/>
+                <a:latin typeface="Calibri"/>
               </a:rPr>
               <a:t>16 / 19</a:t>
             </a:r>
@@ -10126,64 +9961,9 @@
                 <a:solidFill>
                   <a:srgbClr val="34322F"/>
                 </a:solidFill>
-                <a:latin typeface="Karla"/>
+                <a:latin typeface="Calibri"/>
               </a:rPr>
               <a:t>QUESTION THE HEADLINE  ·  LESSON 1 OF 5</a:t>
-            </a:r>
-          </a:p>
-        </p:txBody>
-      </p:sp>
-      <p:sp>
-        <p:nvSpPr>
-          <p:cNvPr id="4" name="Rounded Rectangle 3"/>
-          <p:cNvSpPr/>
-          <p:nvPr/>
-        </p:nvSpPr>
-        <p:spPr>
-          <a:xfrm>
-            <a:off x="7640472" y="246888"/>
-            <a:ext cx="817727" cy="237744"/>
-          </a:xfrm>
-          <a:prstGeom prst="roundRect">
-            <a:avLst>
-              <a:gd name="adj" fmla="val 50000"/>
-            </a:avLst>
-          </a:prstGeom>
-          <a:solidFill>
-            <a:srgbClr val="34322F"/>
-          </a:solidFill>
-          <a:ln>
-            <a:noFill/>
-          </a:ln>
-          <a:effectLst/>
-        </p:spPr>
-        <p:style>
-          <a:lnRef idx="1">
-            <a:schemeClr val="accent1"/>
-          </a:lnRef>
-          <a:fillRef idx="3">
-            <a:schemeClr val="accent1"/>
-          </a:fillRef>
-          <a:effectRef idx="0">
-            <a:schemeClr val="accent1"/>
-          </a:effectRef>
-          <a:fontRef idx="minor">
-            <a:schemeClr val="lt1"/>
-          </a:fontRef>
-        </p:style>
-        <p:txBody>
-          <a:bodyPr rtlCol="0" anchor="ctr" wrap="none" lIns="0" rIns="0" tIns="0" bIns="0"/>
-          <a:lstStyle/>
-          <a:p>
-            <a:pPr algn="ctr"/>
-            <a:r>
-              <a:rPr sz="950" b="1" spc="90">
-                <a:solidFill>
-                  <a:srgbClr val="FFFDF7"/>
-                </a:solidFill>
-                <a:latin typeface="Karla"/>
-              </a:rPr>
-              <a:t>ARGUE</a:t>
             </a:r>
           </a:p>
         </p:txBody>
@@ -10224,7 +10004,7 @@
                 <a:solidFill>
                   <a:srgbClr val="56524B"/>
                 </a:solidFill>
-                <a:latin typeface="Karla"/>
+                <a:latin typeface="Calibri"/>
               </a:rPr>
               <a:t>NO RIGHT ANSWER</a:t>
             </a:r>
@@ -10357,11 +10137,11 @@
               </a:spcAft>
             </a:pPr>
             <a:r>
-              <a:rPr sz="2200" b="1" i="0">
+              <a:rPr sz="2200" b="0" i="0">
                 <a:solidFill>
                   <a:srgbClr val="262422"/>
                 </a:solidFill>
-                <a:latin typeface="Libre Caslon Display"/>
+                <a:latin typeface="Georgia"/>
               </a:rPr>
               <a:t>If the scientists believed every word they wrote, does it matter who paid them?</a:t>
             </a:r>
@@ -10404,7 +10184,7 @@
                 <a:solidFill>
                   <a:srgbClr val="34322F"/>
                 </a:solidFill>
-                <a:latin typeface="Karla"/>
+                <a:latin typeface="Calibri"/>
               </a:rPr>
               <a:t>Two minutes with the person next to you, then we hear from a few.</a:t>
             </a:r>
@@ -10472,7 +10252,7 @@
                 <a:solidFill>
                   <a:srgbClr val="8C877D"/>
                 </a:solidFill>
-                <a:latin typeface="Karla"/>
+                <a:latin typeface="Calibri"/>
               </a:rPr>
               <a:t>The Pastoral Guide</a:t>
             </a:r>
@@ -10515,7 +10295,7 @@
                 <a:solidFill>
                   <a:srgbClr val="8C877D"/>
                 </a:solidFill>
-                <a:latin typeface="Karla"/>
+                <a:latin typeface="Calibri"/>
               </a:rPr>
               <a:t>17 / 19</a:t>
             </a:r>
@@ -10620,7 +10400,7 @@
                 <a:solidFill>
                   <a:srgbClr val="34322F"/>
                 </a:solidFill>
-                <a:latin typeface="Karla"/>
+                <a:latin typeface="Calibri"/>
               </a:rPr>
               <a:t>QUESTION THE HEADLINE  ·  LESSON 1 OF 5</a:t>
             </a:r>
@@ -10629,19 +10409,104 @@
       </p:sp>
       <p:sp>
         <p:nvSpPr>
-          <p:cNvPr id="4" name="Rounded Rectangle 3"/>
+          <p:cNvPr id="5" name="TextBox 4"/>
+          <p:cNvSpPr txBox="1"/>
+          <p:nvPr/>
+        </p:nvSpPr>
+        <p:spPr>
+          <a:xfrm>
+            <a:off x="685800" y="566928"/>
+            <a:ext cx="7772400" cy="434848"/>
+          </a:xfrm>
+          <a:prstGeom prst="rect">
+            <a:avLst/>
+          </a:prstGeom>
+          <a:noFill/>
+          <a:effectLst/>
+        </p:spPr>
+        <p:txBody>
+          <a:bodyPr wrap="square" anchor="t" lIns="0" rIns="0" tIns="0" bIns="0">
+            <a:spAutoFit/>
+          </a:bodyPr>
+          <a:lstStyle/>
+          <a:p>
+            <a:pPr algn="l">
+              <a:lnSpc>
+                <a:spcPct val="105000"/>
+              </a:lnSpc>
+              <a:spcAft>
+                <a:spcPts val="0"/>
+              </a:spcAft>
+            </a:pPr>
+            <a:r>
+              <a:rPr sz="2800" b="0" i="0">
+                <a:solidFill>
+                  <a:srgbClr val="262422"/>
+                </a:solidFill>
+                <a:latin typeface="Georgia"/>
+              </a:rPr>
+              <a:t>Two questions, just for you</a:t>
+            </a:r>
+          </a:p>
+        </p:txBody>
+      </p:sp>
+      <p:sp>
+        <p:nvSpPr>
+          <p:cNvPr id="6" name="Rectangle 5"/>
           <p:cNvSpPr/>
           <p:nvPr/>
         </p:nvSpPr>
         <p:spPr>
           <a:xfrm>
-            <a:off x="7486248" y="246888"/>
-            <a:ext cx="971951" cy="237744"/>
-          </a:xfrm>
-          <a:prstGeom prst="roundRect">
-            <a:avLst>
-              <a:gd name="adj" fmla="val 50000"/>
-            </a:avLst>
+            <a:off x="685800" y="1371600"/>
+            <a:ext cx="7772400" cy="946403"/>
+          </a:xfrm>
+          <a:prstGeom prst="rect">
+            <a:avLst/>
+          </a:prstGeom>
+          <a:solidFill>
+            <a:srgbClr val="FFFFFF"/>
+          </a:solidFill>
+          <a:ln>
+            <a:noFill/>
+          </a:ln>
+          <a:effectLst/>
+        </p:spPr>
+        <p:style>
+          <a:lnRef idx="1">
+            <a:schemeClr val="accent1"/>
+          </a:lnRef>
+          <a:fillRef idx="3">
+            <a:schemeClr val="accent1"/>
+          </a:fillRef>
+          <a:effectRef idx="0">
+            <a:schemeClr val="accent1"/>
+          </a:effectRef>
+          <a:fontRef idx="minor">
+            <a:schemeClr val="lt1"/>
+          </a:fontRef>
+        </p:style>
+        <p:txBody>
+          <a:bodyPr rtlCol="0" anchor="ctr"/>
+          <a:lstStyle/>
+          <a:p>
+            <a:pPr algn="ctr"/>
+          </a:p>
+        </p:txBody>
+      </p:sp>
+      <p:sp>
+        <p:nvSpPr>
+          <p:cNvPr id="7" name="Rectangle 6"/>
+          <p:cNvSpPr/>
+          <p:nvPr/>
+        </p:nvSpPr>
+        <p:spPr>
+          <a:xfrm>
+            <a:off x="685800" y="1371600"/>
+            <a:ext cx="45720" cy="946403"/>
+          </a:xfrm>
+          <a:prstGeom prst="rect">
+            <a:avLst/>
           </a:prstGeom>
           <a:solidFill>
             <a:srgbClr val="34322F"/>
@@ -10666,32 +10531,110 @@
           </a:fontRef>
         </p:style>
         <p:txBody>
-          <a:bodyPr rtlCol="0" anchor="ctr" wrap="none" lIns="0" rIns="0" tIns="0" bIns="0"/>
+          <a:bodyPr rtlCol="0" anchor="ctr"/>
           <a:lstStyle/>
           <a:p>
             <a:pPr algn="ctr"/>
-            <a:r>
-              <a:rPr sz="950" b="1" spc="90">
+          </a:p>
+        </p:txBody>
+      </p:sp>
+      <p:sp>
+        <p:nvSpPr>
+          <p:cNvPr id="8" name="Oval 7"/>
+          <p:cNvSpPr/>
+          <p:nvPr/>
+        </p:nvSpPr>
+        <p:spPr>
+          <a:xfrm>
+            <a:off x="896112" y="1643634"/>
+            <a:ext cx="402336" cy="402336"/>
+          </a:xfrm>
+          <a:prstGeom prst="ellipse">
+            <a:avLst/>
+          </a:prstGeom>
+          <a:solidFill>
+            <a:srgbClr val="34322F"/>
+          </a:solidFill>
+          <a:ln>
+            <a:noFill/>
+          </a:ln>
+          <a:effectLst/>
+        </p:spPr>
+        <p:style>
+          <a:lnRef idx="1">
+            <a:schemeClr val="accent1"/>
+          </a:lnRef>
+          <a:fillRef idx="3">
+            <a:schemeClr val="accent1"/>
+          </a:fillRef>
+          <a:effectRef idx="0">
+            <a:schemeClr val="accent1"/>
+          </a:effectRef>
+          <a:fontRef idx="minor">
+            <a:schemeClr val="lt1"/>
+          </a:fontRef>
+        </p:style>
+        <p:txBody>
+          <a:bodyPr rtlCol="0" anchor="ctr"/>
+          <a:lstStyle/>
+          <a:p>
+            <a:pPr algn="ctr"/>
+          </a:p>
+        </p:txBody>
+      </p:sp>
+      <p:sp>
+        <p:nvSpPr>
+          <p:cNvPr id="9" name="TextBox 8"/>
+          <p:cNvSpPr txBox="1"/>
+          <p:nvPr/>
+        </p:nvSpPr>
+        <p:spPr>
+          <a:xfrm>
+            <a:off x="896112" y="1735074"/>
+            <a:ext cx="402336" cy="219456"/>
+          </a:xfrm>
+          <a:prstGeom prst="rect">
+            <a:avLst/>
+          </a:prstGeom>
+          <a:noFill/>
+          <a:effectLst/>
+        </p:spPr>
+        <p:txBody>
+          <a:bodyPr wrap="square" anchor="t" lIns="0" rIns="0" tIns="0" bIns="0">
+            <a:spAutoFit/>
+          </a:bodyPr>
+          <a:lstStyle/>
+          <a:p>
+            <a:pPr algn="ctr">
+              <a:lnSpc>
+                <a:spcPct val="125000"/>
+              </a:lnSpc>
+              <a:spcAft>
+                <a:spcPts val="0"/>
+              </a:spcAft>
+            </a:pPr>
+            <a:r>
+              <a:rPr sz="1200" b="1" i="0">
                 <a:solidFill>
                   <a:srgbClr val="FFFDF7"/>
                 </a:solidFill>
-                <a:latin typeface="Karla"/>
-              </a:rPr>
-              <a:t>FOR YOU</a:t>
-            </a:r>
-          </a:p>
-        </p:txBody>
-      </p:sp>
-      <p:sp>
-        <p:nvSpPr>
-          <p:cNvPr id="5" name="TextBox 4"/>
-          <p:cNvSpPr txBox="1"/>
-          <p:nvPr/>
-        </p:nvSpPr>
-        <p:spPr>
-          <a:xfrm>
-            <a:off x="685800" y="566928"/>
-            <a:ext cx="7772400" cy="434848"/>
+                <a:latin typeface="Calibri"/>
+              </a:rPr>
+              <a:t>1</a:t>
+            </a:r>
+          </a:p>
+        </p:txBody>
+      </p:sp>
+      <p:sp>
+        <p:nvSpPr>
+          <p:cNvPr id="10" name="TextBox 9"/>
+          <p:cNvSpPr txBox="1"/>
+          <p:nvPr/>
+        </p:nvSpPr>
+        <p:spPr>
+          <a:xfrm>
+            <a:off x="1554480" y="1572768"/>
+            <a:ext cx="6675120" cy="544068"/>
           </a:xfrm>
           <a:prstGeom prst="rect">
             <a:avLst/>
@@ -10707,33 +10650,33 @@
           <a:p>
             <a:pPr algn="l">
               <a:lnSpc>
-                <a:spcPct val="105000"/>
-              </a:lnSpc>
-              <a:spcAft>
-                <a:spcPts val="0"/>
-              </a:spcAft>
-            </a:pPr>
-            <a:r>
-              <a:rPr sz="2800" b="1" i="0">
+                <a:spcPct val="115000"/>
+              </a:lnSpc>
+              <a:spcAft>
+                <a:spcPts val="0"/>
+              </a:spcAft>
+            </a:pPr>
+            <a:r>
+              <a:rPr sz="1700" b="0" i="0">
                 <a:solidFill>
                   <a:srgbClr val="262422"/>
                 </a:solidFill>
-                <a:latin typeface="Libre Caslon Display"/>
-              </a:rPr>
-              <a:t>Two questions, just for you</a:t>
-            </a:r>
-          </a:p>
-        </p:txBody>
-      </p:sp>
-      <p:sp>
-        <p:nvSpPr>
-          <p:cNvPr id="6" name="Rectangle 5"/>
+                <a:latin typeface="Georgia"/>
+              </a:rPr>
+              <a:t>Where did you move on the line, and which card moved you?</a:t>
+            </a:r>
+          </a:p>
+        </p:txBody>
+      </p:sp>
+      <p:sp>
+        <p:nvSpPr>
+          <p:cNvPr id="11" name="Rectangle 10"/>
           <p:cNvSpPr/>
           <p:nvPr/>
         </p:nvSpPr>
         <p:spPr>
           <a:xfrm>
-            <a:off x="685800" y="1371600"/>
+            <a:off x="685800" y="2537460"/>
             <a:ext cx="7772400" cy="946403"/>
           </a:xfrm>
           <a:prstGeom prst="rect">
@@ -10771,13 +10714,13 @@
       </p:sp>
       <p:sp>
         <p:nvSpPr>
-          <p:cNvPr id="7" name="Rectangle 6"/>
+          <p:cNvPr id="12" name="Rectangle 11"/>
           <p:cNvSpPr/>
           <p:nvPr/>
         </p:nvSpPr>
         <p:spPr>
           <a:xfrm>
-            <a:off x="685800" y="1371600"/>
+            <a:off x="685800" y="2537460"/>
             <a:ext cx="45720" cy="946403"/>
           </a:xfrm>
           <a:prstGeom prst="rect">
@@ -10815,13 +10758,13 @@
       </p:sp>
       <p:sp>
         <p:nvSpPr>
-          <p:cNvPr id="8" name="Oval 7"/>
+          <p:cNvPr id="13" name="Oval 12"/>
           <p:cNvSpPr/>
           <p:nvPr/>
         </p:nvSpPr>
         <p:spPr>
           <a:xfrm>
-            <a:off x="896112" y="1643634"/>
+            <a:off x="896112" y="2809494"/>
             <a:ext cx="402336" cy="402336"/>
           </a:xfrm>
           <a:prstGeom prst="ellipse">
@@ -10859,224 +10802,6 @@
       </p:sp>
       <p:sp>
         <p:nvSpPr>
-          <p:cNvPr id="9" name="TextBox 8"/>
-          <p:cNvSpPr txBox="1"/>
-          <p:nvPr/>
-        </p:nvSpPr>
-        <p:spPr>
-          <a:xfrm>
-            <a:off x="896112" y="1735074"/>
-            <a:ext cx="402336" cy="219456"/>
-          </a:xfrm>
-          <a:prstGeom prst="rect">
-            <a:avLst/>
-          </a:prstGeom>
-          <a:noFill/>
-          <a:effectLst/>
-        </p:spPr>
-        <p:txBody>
-          <a:bodyPr wrap="square" anchor="t" lIns="0" rIns="0" tIns="0" bIns="0">
-            <a:spAutoFit/>
-          </a:bodyPr>
-          <a:lstStyle/>
-          <a:p>
-            <a:pPr algn="ctr">
-              <a:lnSpc>
-                <a:spcPct val="125000"/>
-              </a:lnSpc>
-              <a:spcAft>
-                <a:spcPts val="0"/>
-              </a:spcAft>
-            </a:pPr>
-            <a:r>
-              <a:rPr sz="1200" b="1" i="0">
-                <a:solidFill>
-                  <a:srgbClr val="FFFDF7"/>
-                </a:solidFill>
-                <a:latin typeface="Karla"/>
-              </a:rPr>
-              <a:t>1</a:t>
-            </a:r>
-          </a:p>
-        </p:txBody>
-      </p:sp>
-      <p:sp>
-        <p:nvSpPr>
-          <p:cNvPr id="10" name="TextBox 9"/>
-          <p:cNvSpPr txBox="1"/>
-          <p:nvPr/>
-        </p:nvSpPr>
-        <p:spPr>
-          <a:xfrm>
-            <a:off x="1554480" y="1572768"/>
-            <a:ext cx="6675120" cy="544068"/>
-          </a:xfrm>
-          <a:prstGeom prst="rect">
-            <a:avLst/>
-          </a:prstGeom>
-          <a:noFill/>
-          <a:effectLst/>
-        </p:spPr>
-        <p:txBody>
-          <a:bodyPr wrap="square" anchor="t" lIns="0" rIns="0" tIns="0" bIns="0">
-            <a:spAutoFit/>
-          </a:bodyPr>
-          <a:lstStyle/>
-          <a:p>
-            <a:pPr algn="l">
-              <a:lnSpc>
-                <a:spcPct val="115000"/>
-              </a:lnSpc>
-              <a:spcAft>
-                <a:spcPts val="0"/>
-              </a:spcAft>
-            </a:pPr>
-            <a:r>
-              <a:rPr sz="1700" b="1" i="0">
-                <a:solidFill>
-                  <a:srgbClr val="262422"/>
-                </a:solidFill>
-                <a:latin typeface="Libre Caslon Display"/>
-              </a:rPr>
-              <a:t>Where did you move on the line, and which card moved you?</a:t>
-            </a:r>
-          </a:p>
-        </p:txBody>
-      </p:sp>
-      <p:sp>
-        <p:nvSpPr>
-          <p:cNvPr id="11" name="Rectangle 10"/>
-          <p:cNvSpPr/>
-          <p:nvPr/>
-        </p:nvSpPr>
-        <p:spPr>
-          <a:xfrm>
-            <a:off x="685800" y="2537460"/>
-            <a:ext cx="7772400" cy="946403"/>
-          </a:xfrm>
-          <a:prstGeom prst="rect">
-            <a:avLst/>
-          </a:prstGeom>
-          <a:solidFill>
-            <a:srgbClr val="FFFFFF"/>
-          </a:solidFill>
-          <a:ln>
-            <a:noFill/>
-          </a:ln>
-          <a:effectLst/>
-        </p:spPr>
-        <p:style>
-          <a:lnRef idx="1">
-            <a:schemeClr val="accent1"/>
-          </a:lnRef>
-          <a:fillRef idx="3">
-            <a:schemeClr val="accent1"/>
-          </a:fillRef>
-          <a:effectRef idx="0">
-            <a:schemeClr val="accent1"/>
-          </a:effectRef>
-          <a:fontRef idx="minor">
-            <a:schemeClr val="lt1"/>
-          </a:fontRef>
-        </p:style>
-        <p:txBody>
-          <a:bodyPr rtlCol="0" anchor="ctr"/>
-          <a:lstStyle/>
-          <a:p>
-            <a:pPr algn="ctr"/>
-          </a:p>
-        </p:txBody>
-      </p:sp>
-      <p:sp>
-        <p:nvSpPr>
-          <p:cNvPr id="12" name="Rectangle 11"/>
-          <p:cNvSpPr/>
-          <p:nvPr/>
-        </p:nvSpPr>
-        <p:spPr>
-          <a:xfrm>
-            <a:off x="685800" y="2537460"/>
-            <a:ext cx="45720" cy="946403"/>
-          </a:xfrm>
-          <a:prstGeom prst="rect">
-            <a:avLst/>
-          </a:prstGeom>
-          <a:solidFill>
-            <a:srgbClr val="34322F"/>
-          </a:solidFill>
-          <a:ln>
-            <a:noFill/>
-          </a:ln>
-          <a:effectLst/>
-        </p:spPr>
-        <p:style>
-          <a:lnRef idx="1">
-            <a:schemeClr val="accent1"/>
-          </a:lnRef>
-          <a:fillRef idx="3">
-            <a:schemeClr val="accent1"/>
-          </a:fillRef>
-          <a:effectRef idx="0">
-            <a:schemeClr val="accent1"/>
-          </a:effectRef>
-          <a:fontRef idx="minor">
-            <a:schemeClr val="lt1"/>
-          </a:fontRef>
-        </p:style>
-        <p:txBody>
-          <a:bodyPr rtlCol="0" anchor="ctr"/>
-          <a:lstStyle/>
-          <a:p>
-            <a:pPr algn="ctr"/>
-          </a:p>
-        </p:txBody>
-      </p:sp>
-      <p:sp>
-        <p:nvSpPr>
-          <p:cNvPr id="13" name="Oval 12"/>
-          <p:cNvSpPr/>
-          <p:nvPr/>
-        </p:nvSpPr>
-        <p:spPr>
-          <a:xfrm>
-            <a:off x="896112" y="2809494"/>
-            <a:ext cx="402336" cy="402336"/>
-          </a:xfrm>
-          <a:prstGeom prst="ellipse">
-            <a:avLst/>
-          </a:prstGeom>
-          <a:solidFill>
-            <a:srgbClr val="34322F"/>
-          </a:solidFill>
-          <a:ln>
-            <a:noFill/>
-          </a:ln>
-          <a:effectLst/>
-        </p:spPr>
-        <p:style>
-          <a:lnRef idx="1">
-            <a:schemeClr val="accent1"/>
-          </a:lnRef>
-          <a:fillRef idx="3">
-            <a:schemeClr val="accent1"/>
-          </a:fillRef>
-          <a:effectRef idx="0">
-            <a:schemeClr val="accent1"/>
-          </a:effectRef>
-          <a:fontRef idx="minor">
-            <a:schemeClr val="lt1"/>
-          </a:fontRef>
-        </p:style>
-        <p:txBody>
-          <a:bodyPr rtlCol="0" anchor="ctr"/>
-          <a:lstStyle/>
-          <a:p>
-            <a:pPr algn="ctr"/>
-          </a:p>
-        </p:txBody>
-      </p:sp>
-      <p:sp>
-        <p:nvSpPr>
           <p:cNvPr id="14" name="TextBox 13"/>
           <p:cNvSpPr txBox="1"/>
           <p:nvPr/>
@@ -11111,7 +10836,7 @@
                 <a:solidFill>
                   <a:srgbClr val="FFFDF7"/>
                 </a:solidFill>
-                <a:latin typeface="Karla"/>
+                <a:latin typeface="Calibri"/>
               </a:rPr>
               <a:t>2</a:t>
             </a:r>
@@ -11150,11 +10875,11 @@
               </a:spcAft>
             </a:pPr>
             <a:r>
-              <a:rPr sz="1700" b="1" i="0">
+              <a:rPr sz="1700" b="0" i="0">
                 <a:solidFill>
                   <a:srgbClr val="262422"/>
                 </a:solidFill>
-                <a:latin typeface="Libre Caslon Display"/>
+                <a:latin typeface="Georgia"/>
               </a:rPr>
               <a:t>Next time you see a headline, which of the five questions will you ask first?</a:t>
             </a:r>
@@ -11197,7 +10922,7 @@
                 <a:solidFill>
                   <a:srgbClr val="34322F"/>
                 </a:solidFill>
-                <a:latin typeface="Karla"/>
+                <a:latin typeface="Calibri"/>
               </a:rPr>
               <a:t>Write your answers in the last box of your evidence sheet. It is yours to keep, and nothing is read out.</a:t>
             </a:r>
@@ -11265,7 +10990,7 @@
                 <a:solidFill>
                   <a:srgbClr val="8C877D"/>
                 </a:solidFill>
-                <a:latin typeface="Karla"/>
+                <a:latin typeface="Calibri"/>
               </a:rPr>
               <a:t>The Pastoral Guide</a:t>
             </a:r>
@@ -11308,7 +11033,7 @@
                 <a:solidFill>
                   <a:srgbClr val="8C877D"/>
                 </a:solidFill>
-                <a:latin typeface="Karla"/>
+                <a:latin typeface="Calibri"/>
               </a:rPr>
               <a:t>18 / 19</a:t>
             </a:r>
@@ -11425,7 +11150,7 @@
                 <a:solidFill>
                   <a:srgbClr val="34322F"/>
                 </a:solidFill>
-                <a:latin typeface="Karla"/>
+                <a:latin typeface="Calibri"/>
               </a:rPr>
               <a:t>FOR THE TEACHER  ·  SOURCES</a:t>
             </a:r>
@@ -11464,11 +11189,11 @@
               </a:spcAft>
             </a:pPr>
             <a:r>
-              <a:rPr sz="2600" b="1" i="0">
+              <a:rPr sz="2600" b="0" i="0">
                 <a:solidFill>
                   <a:srgbClr val="262422"/>
                 </a:solidFill>
-                <a:latin typeface="Libre Caslon Display"/>
+                <a:latin typeface="Georgia"/>
               </a:rPr>
               <a:t>Where the evidence came from</a:t>
             </a:r>
@@ -11511,7 +11236,7 @@
                 <a:solidFill>
                   <a:srgbClr val="262422"/>
                 </a:solidFill>
-                <a:latin typeface="Karla"/>
+                <a:latin typeface="Calibri"/>
               </a:rPr>
               <a:t>Kearns C. E., Schmidt L. A. and Glantz S. A. (2016). Sugar industry and coronary heart disease research. JAMA Internal Medicine, 176(11), 1680–1685.</a:t>
             </a:r>
@@ -11554,7 +11279,7 @@
                 <a:solidFill>
                   <a:srgbClr val="262422"/>
                 </a:solidFill>
-                <a:latin typeface="Karla"/>
+                <a:latin typeface="Calibri"/>
               </a:rPr>
               <a:t>Bailey M. (2016). Sugar industry secretly paid for favorable Harvard research. STAT News, 12 September 2016.</a:t>
             </a:r>
@@ -11622,7 +11347,7 @@
                 <a:solidFill>
                   <a:srgbClr val="8C877D"/>
                 </a:solidFill>
-                <a:latin typeface="Karla"/>
+                <a:latin typeface="Calibri"/>
               </a:rPr>
               <a:t>The Pastoral Guide</a:t>
             </a:r>
@@ -11665,7 +11390,7 @@
                 <a:solidFill>
                   <a:srgbClr val="8C877D"/>
                 </a:solidFill>
-                <a:latin typeface="Karla"/>
+                <a:latin typeface="Calibri"/>
               </a:rPr>
               <a:t>19 / 19</a:t>
             </a:r>
@@ -11782,7 +11507,7 @@
                 <a:solidFill>
                   <a:srgbClr val="34322F"/>
                 </a:solidFill>
-                <a:latin typeface="Karla"/>
+                <a:latin typeface="Calibri"/>
               </a:rPr>
               <a:t>TEACHER SLIDE  ·  SKIP IT</a:t>
             </a:r>
@@ -11821,11 +11546,11 @@
               </a:spcAft>
             </a:pPr>
             <a:r>
-              <a:rPr sz="2800" b="1" i="0">
+              <a:rPr sz="2800" b="0" i="0">
                 <a:solidFill>
                   <a:srgbClr val="262422"/>
                 </a:solidFill>
-                <a:latin typeface="Libre Caslon Display"/>
+                <a:latin typeface="Georgia"/>
               </a:rPr>
               <a:t>Before the lesson</a:t>
             </a:r>
@@ -11868,7 +11593,7 @@
                 <a:solidFill>
                   <a:srgbClr val="56524B"/>
                 </a:solidFill>
-                <a:latin typeface="Karla"/>
+                <a:latin typeface="Calibri"/>
               </a:rPr>
               <a:t>This lesson is about who pays for research, and why readers need to be told.</a:t>
             </a:r>
@@ -11999,7 +11724,7 @@
                 <a:solidFill>
                   <a:srgbClr val="FFFDF7"/>
                 </a:solidFill>
-                <a:latin typeface="Karla"/>
+                <a:latin typeface="Calibri"/>
               </a:rPr>
               <a:t>1</a:t>
             </a:r>
@@ -12038,11 +11763,11 @@
               </a:spcAft>
             </a:pPr>
             <a:r>
-              <a:rPr sz="1300" b="1" i="0">
+              <a:rPr sz="1300" b="0" i="0">
                 <a:solidFill>
                   <a:srgbClr val="262422"/>
                 </a:solidFill>
-                <a:latin typeface="Libre Caslon Display"/>
+                <a:latin typeface="Georgia"/>
               </a:rPr>
               <a:t>Print and cut the evidence cards</a:t>
             </a:r>
@@ -12085,7 +11810,7 @@
                 <a:solidFill>
                   <a:srgbClr val="56524B"/>
                 </a:solidFill>
-                <a:latin typeface="Karla"/>
+                <a:latin typeface="Calibri"/>
               </a:rPr>
               <a:t>One set of four per group of three or four. Keep them in order, A to D.</a:t>
             </a:r>
@@ -12216,7 +11941,7 @@
                 <a:solidFill>
                   <a:srgbClr val="FFFDF7"/>
                 </a:solidFill>
-                <a:latin typeface="Karla"/>
+                <a:latin typeface="Calibri"/>
               </a:rPr>
               <a:t>2</a:t>
             </a:r>
@@ -12255,11 +11980,11 @@
               </a:spcAft>
             </a:pPr>
             <a:r>
-              <a:rPr sz="1300" b="1" i="0">
+              <a:rPr sz="1300" b="0" i="0">
                 <a:solidFill>
                   <a:srgbClr val="262422"/>
                 </a:solidFill>
-                <a:latin typeface="Libre Caslon Display"/>
+                <a:latin typeface="Georgia"/>
               </a:rPr>
               <a:t>Print two sheets per student</a:t>
             </a:r>
@@ -12302,7 +12027,7 @@
                 <a:solidFill>
                   <a:srgbClr val="56524B"/>
                 </a:solidFill>
-                <a:latin typeface="Karla"/>
+                <a:latin typeface="Calibri"/>
               </a:rPr>
               <a:t>This lesson’s evidence sheet, and the front page sheet, which is the same every lesson.</a:t>
             </a:r>
@@ -12433,7 +12158,7 @@
                 <a:solidFill>
                   <a:srgbClr val="FFFDF7"/>
                 </a:solidFill>
-                <a:latin typeface="Karla"/>
+                <a:latin typeface="Calibri"/>
               </a:rPr>
               <a:t>3</a:t>
             </a:r>
@@ -12472,11 +12197,11 @@
               </a:spcAft>
             </a:pPr>
             <a:r>
-              <a:rPr sz="1300" b="1" i="0">
+              <a:rPr sz="1300" b="0" i="0">
                 <a:solidFill>
                   <a:srgbClr val="262422"/>
                 </a:solidFill>
-                <a:latin typeface="Libre Caslon Display"/>
+                <a:latin typeface="Georgia"/>
               </a:rPr>
               <a:t>Mark out the line</a:t>
             </a:r>
@@ -12519,7 +12244,7 @@
                 <a:solidFill>
                   <a:srgbClr val="56524B"/>
                 </a:solidFill>
-                <a:latin typeface="Karla"/>
+                <a:latin typeface="Calibri"/>
               </a:rPr>
               <a:t>A 0 at one end of the room and a 10 at the other: definitely false to definitely true.</a:t>
             </a:r>
@@ -12650,7 +12375,7 @@
                 <a:solidFill>
                   <a:srgbClr val="FFFDF7"/>
                 </a:solidFill>
-                <a:latin typeface="Karla"/>
+                <a:latin typeface="Calibri"/>
               </a:rPr>
               <a:t>4</a:t>
             </a:r>
@@ -12689,11 +12414,11 @@
               </a:spcAft>
             </a:pPr>
             <a:r>
-              <a:rPr sz="1300" b="1" i="0">
+              <a:rPr sz="1300" b="0" i="0">
                 <a:solidFill>
                   <a:srgbClr val="262422"/>
                 </a:solidFill>
-                <a:latin typeface="Libre Caslon Display"/>
+                <a:latin typeface="Georgia"/>
               </a:rPr>
               <a:t>Hold the cards back</a:t>
             </a:r>
@@ -12736,7 +12461,7 @@
                 <a:solidFill>
                   <a:srgbClr val="56524B"/>
                 </a:solidFill>
-                <a:latin typeface="Karla"/>
+                <a:latin typeface="Calibri"/>
               </a:rPr>
               <a:t>Hand out one card per round, never the next one early. The verdict stays hidden until the end.</a:t>
             </a:r>
@@ -12804,7 +12529,7 @@
                 <a:solidFill>
                   <a:srgbClr val="8C877D"/>
                 </a:solidFill>
-                <a:latin typeface="Karla"/>
+                <a:latin typeface="Calibri"/>
               </a:rPr>
               <a:t>The Pastoral Guide</a:t>
             </a:r>
@@ -12847,7 +12572,7 @@
                 <a:solidFill>
                   <a:srgbClr val="8C877D"/>
                 </a:solidFill>
-                <a:latin typeface="Karla"/>
+                <a:latin typeface="Calibri"/>
               </a:rPr>
               <a:t>2 / 19</a:t>
             </a:r>
@@ -12952,7 +12677,7 @@
                 <a:solidFill>
                   <a:srgbClr val="34322F"/>
                 </a:solidFill>
-                <a:latin typeface="Karla"/>
+                <a:latin typeface="Calibri"/>
               </a:rPr>
               <a:t>QUESTION THE HEADLINE  ·  LESSON 1 OF 5</a:t>
             </a:r>
@@ -12995,7 +12720,7 @@
                 <a:solidFill>
                   <a:srgbClr val="8C877D"/>
                 </a:solidFill>
-                <a:latin typeface="Karla"/>
+                <a:latin typeface="Calibri"/>
               </a:rPr>
               <a:t>A recreated front page</a:t>
             </a:r>
@@ -13078,11 +12803,11 @@
               </a:spcAft>
             </a:pPr>
             <a:r>
-              <a:rPr sz="3000" b="1" i="0">
+              <a:rPr sz="3000" b="0" i="0">
                 <a:solidFill>
                   <a:srgbClr val="262422"/>
                 </a:solidFill>
-                <a:latin typeface="Libre Caslon Display"/>
+                <a:latin typeface="Georgia"/>
               </a:rPr>
               <a:t>The Daily Claim</a:t>
             </a:r>
@@ -13169,7 +12894,7 @@
                 <a:solidFill>
                   <a:srgbClr val="56524B"/>
                 </a:solidFill>
-                <a:latin typeface="Karla"/>
+                <a:latin typeface="Calibri"/>
               </a:rPr>
               <a:t>BOSTON, 1967</a:t>
             </a:r>
@@ -13212,7 +12937,7 @@
                 <a:solidFill>
                   <a:srgbClr val="56524B"/>
                 </a:solidFill>
-                <a:latin typeface="Karla"/>
+                <a:latin typeface="Calibri"/>
               </a:rPr>
               <a:t>VOLUME ONE</a:t>
             </a:r>
@@ -13255,7 +12980,7 @@
                 <a:solidFill>
                   <a:srgbClr val="56524B"/>
                 </a:solidFill>
-                <a:latin typeface="Karla"/>
+                <a:latin typeface="Calibri"/>
               </a:rPr>
               <a:t>LESSON 1 OF 5</a:t>
             </a:r>
@@ -13338,11 +13063,11 @@
               </a:spcAft>
             </a:pPr>
             <a:r>
-              <a:rPr sz="2800" b="1" i="0">
+              <a:rPr sz="2800" b="0" i="0">
                 <a:solidFill>
                   <a:srgbClr val="262422"/>
                 </a:solidFill>
-                <a:latin typeface="Libre Caslon Display"/>
+                <a:latin typeface="Georgia"/>
               </a:rPr>
               <a:t>FAT, NOT SUGAR, IS THE</a:t>
             </a:r>
@@ -13350,11 +13075,11 @@
               <a:rPr lang="en-GB"/>
             </a:br>
             <a:r>
-              <a:rPr sz="2800" b="1" i="0">
+              <a:rPr sz="2800" b="0" i="0">
                 <a:solidFill>
                   <a:srgbClr val="262422"/>
                 </a:solidFill>
-                <a:latin typeface="Libre Caslon Display"/>
+                <a:latin typeface="Georgia"/>
               </a:rPr>
               <a:t>DANGER TO YOUR HEART</a:t>
             </a:r>
@@ -13742,11 +13467,11 @@
               </a:spcAft>
             </a:pPr>
             <a:r>
-              <a:rPr sz="1300" b="1" i="0">
+              <a:rPr sz="1300" b="0" i="0">
                 <a:solidFill>
                   <a:srgbClr val="34322F"/>
                 </a:solidFill>
-                <a:latin typeface="Libre Caslon Display"/>
+                <a:latin typeface="Georgia"/>
               </a:rPr>
               <a:t>The only diet change that can prevent heart disease is cutting fat and cholesterol.</a:t>
             </a:r>
@@ -13789,7 +13514,7 @@
                 <a:solidFill>
                   <a:srgbClr val="56524B"/>
                 </a:solidFill>
-                <a:latin typeface="Karla"/>
+                <a:latin typeface="Calibri"/>
               </a:rPr>
               <a:t>WHAT THE REVIEW CONCLUDED</a:t>
             </a:r>
@@ -13857,7 +13582,7 @@
                 <a:solidFill>
                   <a:srgbClr val="8C877D"/>
                 </a:solidFill>
-                <a:latin typeface="Karla"/>
+                <a:latin typeface="Calibri"/>
               </a:rPr>
               <a:t>The Pastoral Guide</a:t>
             </a:r>
@@ -13900,7 +13625,7 @@
                 <a:solidFill>
                   <a:srgbClr val="8C877D"/>
                 </a:solidFill>
-                <a:latin typeface="Karla"/>
+                <a:latin typeface="Calibri"/>
               </a:rPr>
               <a:t>3 / 19</a:t>
             </a:r>
@@ -14005,64 +13730,9 @@
                 <a:solidFill>
                   <a:srgbClr val="34322F"/>
                 </a:solidFill>
-                <a:latin typeface="Karla"/>
+                <a:latin typeface="Calibri"/>
               </a:rPr>
               <a:t>QUESTION THE HEADLINE  ·  LESSON 1 OF 5</a:t>
-            </a:r>
-          </a:p>
-        </p:txBody>
-      </p:sp>
-      <p:sp>
-        <p:nvSpPr>
-          <p:cNvPr id="4" name="Rounded Rectangle 3"/>
-          <p:cNvSpPr/>
-          <p:nvPr/>
-        </p:nvSpPr>
-        <p:spPr>
-          <a:xfrm>
-            <a:off x="7398742" y="246888"/>
-            <a:ext cx="1059457" cy="237744"/>
-          </a:xfrm>
-          <a:prstGeom prst="roundRect">
-            <a:avLst>
-              <a:gd name="adj" fmla="val 50000"/>
-            </a:avLst>
-          </a:prstGeom>
-          <a:solidFill>
-            <a:srgbClr val="34322F"/>
-          </a:solidFill>
-          <a:ln>
-            <a:noFill/>
-          </a:ln>
-          <a:effectLst/>
-        </p:spPr>
-        <p:style>
-          <a:lnRef idx="1">
-            <a:schemeClr val="accent1"/>
-          </a:lnRef>
-          <a:fillRef idx="3">
-            <a:schemeClr val="accent1"/>
-          </a:fillRef>
-          <a:effectRef idx="0">
-            <a:schemeClr val="accent1"/>
-          </a:effectRef>
-          <a:fontRef idx="minor">
-            <a:schemeClr val="lt1"/>
-          </a:fontRef>
-        </p:style>
-        <p:txBody>
-          <a:bodyPr rtlCol="0" anchor="ctr" wrap="none" lIns="0" rIns="0" tIns="0" bIns="0"/>
-          <a:lstStyle/>
-          <a:p>
-            <a:pPr algn="ctr"/>
-            <a:r>
-              <a:rPr sz="950" b="1" spc="90">
-                <a:solidFill>
-                  <a:srgbClr val="FFFDF7"/>
-                </a:solidFill>
-                <a:latin typeface="Karla"/>
-              </a:rPr>
-              <a:t>STAND UP</a:t>
             </a:r>
           </a:p>
         </p:txBody>
@@ -14099,11 +13769,11 @@
               </a:spcAft>
             </a:pPr>
             <a:r>
-              <a:rPr sz="2800" b="1" i="0">
+              <a:rPr sz="2800" b="0" i="0">
                 <a:solidFill>
                   <a:srgbClr val="262422"/>
                 </a:solidFill>
-                <a:latin typeface="Libre Caslon Display"/>
+                <a:latin typeface="Georgia"/>
               </a:rPr>
               <a:t>How much do you believe it?</a:t>
             </a:r>
@@ -14236,11 +13906,11 @@
               </a:spcAft>
             </a:pPr>
             <a:r>
-              <a:rPr sz="1800" b="1" i="0">
+              <a:rPr sz="1800" b="0" i="0">
                 <a:solidFill>
                   <a:srgbClr val="262422"/>
                 </a:solidFill>
-                <a:latin typeface="Libre Caslon Display"/>
+                <a:latin typeface="Georgia"/>
               </a:rPr>
               <a:t>“Sugar is not a problem for your heart. Fat is.”</a:t>
             </a:r>
@@ -14371,7 +14041,7 @@
                 <a:solidFill>
                   <a:srgbClr val="262422"/>
                 </a:solidFill>
-                <a:latin typeface="Karla"/>
+                <a:latin typeface="Calibri"/>
               </a:rPr>
               <a:t>0</a:t>
             </a:r>
@@ -14458,7 +14128,7 @@
                 <a:solidFill>
                   <a:srgbClr val="56524B"/>
                 </a:solidFill>
-                <a:latin typeface="Karla"/>
+                <a:latin typeface="Calibri"/>
               </a:rPr>
               <a:t>1</a:t>
             </a:r>
@@ -14545,7 +14215,7 @@
                 <a:solidFill>
                   <a:srgbClr val="56524B"/>
                 </a:solidFill>
-                <a:latin typeface="Karla"/>
+                <a:latin typeface="Calibri"/>
               </a:rPr>
               <a:t>2</a:t>
             </a:r>
@@ -14632,7 +14302,7 @@
                 <a:solidFill>
                   <a:srgbClr val="56524B"/>
                 </a:solidFill>
-                <a:latin typeface="Karla"/>
+                <a:latin typeface="Calibri"/>
               </a:rPr>
               <a:t>3</a:t>
             </a:r>
@@ -14719,7 +14389,7 @@
                 <a:solidFill>
                   <a:srgbClr val="56524B"/>
                 </a:solidFill>
-                <a:latin typeface="Karla"/>
+                <a:latin typeface="Calibri"/>
               </a:rPr>
               <a:t>4</a:t>
             </a:r>
@@ -14806,7 +14476,7 @@
                 <a:solidFill>
                   <a:srgbClr val="262422"/>
                 </a:solidFill>
-                <a:latin typeface="Karla"/>
+                <a:latin typeface="Calibri"/>
               </a:rPr>
               <a:t>5</a:t>
             </a:r>
@@ -14893,7 +14563,7 @@
                 <a:solidFill>
                   <a:srgbClr val="56524B"/>
                 </a:solidFill>
-                <a:latin typeface="Karla"/>
+                <a:latin typeface="Calibri"/>
               </a:rPr>
               <a:t>6</a:t>
             </a:r>
@@ -14980,7 +14650,7 @@
                 <a:solidFill>
                   <a:srgbClr val="56524B"/>
                 </a:solidFill>
-                <a:latin typeface="Karla"/>
+                <a:latin typeface="Calibri"/>
               </a:rPr>
               <a:t>7</a:t>
             </a:r>
@@ -15067,7 +14737,7 @@
                 <a:solidFill>
                   <a:srgbClr val="56524B"/>
                 </a:solidFill>
-                <a:latin typeface="Karla"/>
+                <a:latin typeface="Calibri"/>
               </a:rPr>
               <a:t>8</a:t>
             </a:r>
@@ -15154,7 +14824,7 @@
                 <a:solidFill>
                   <a:srgbClr val="56524B"/>
                 </a:solidFill>
-                <a:latin typeface="Karla"/>
+                <a:latin typeface="Calibri"/>
               </a:rPr>
               <a:t>9</a:t>
             </a:r>
@@ -15241,7 +14911,7 @@
                 <a:solidFill>
                   <a:srgbClr val="262422"/>
                 </a:solidFill>
-                <a:latin typeface="Karla"/>
+                <a:latin typeface="Calibri"/>
               </a:rPr>
               <a:t>10</a:t>
             </a:r>
@@ -15284,7 +14954,7 @@
                 <a:solidFill>
                   <a:srgbClr val="34322F"/>
                 </a:solidFill>
-                <a:latin typeface="Karla"/>
+                <a:latin typeface="Calibri"/>
               </a:rPr>
               <a:t>Definitely false</a:t>
             </a:r>
@@ -15327,7 +14997,7 @@
                 <a:solidFill>
                   <a:srgbClr val="34322F"/>
                 </a:solidFill>
-                <a:latin typeface="Karla"/>
+                <a:latin typeface="Calibri"/>
               </a:rPr>
               <a:t>Definitely true</a:t>
             </a:r>
@@ -15370,7 +15040,7 @@
                 <a:solidFill>
                   <a:srgbClr val="34322F"/>
                 </a:solidFill>
-                <a:latin typeface="Karla"/>
+                <a:latin typeface="Calibri"/>
               </a:rPr>
               <a:t>Stand on the line where you are now. Two or three people say why they are standing there.</a:t>
             </a:r>
@@ -15438,7 +15108,7 @@
                 <a:solidFill>
                   <a:srgbClr val="8C877D"/>
                 </a:solidFill>
-                <a:latin typeface="Karla"/>
+                <a:latin typeface="Calibri"/>
               </a:rPr>
               <a:t>The Pastoral Guide</a:t>
             </a:r>
@@ -15481,7 +15151,7 @@
                 <a:solidFill>
                   <a:srgbClr val="8C877D"/>
                 </a:solidFill>
-                <a:latin typeface="Karla"/>
+                <a:latin typeface="Calibri"/>
               </a:rPr>
               <a:t>4 / 19</a:t>
             </a:r>
@@ -15586,64 +15256,9 @@
                 <a:solidFill>
                   <a:srgbClr val="34322F"/>
                 </a:solidFill>
-                <a:latin typeface="Karla"/>
+                <a:latin typeface="Calibri"/>
               </a:rPr>
               <a:t>QUESTION THE HEADLINE  ·  LESSON 1 OF 5</a:t>
-            </a:r>
-          </a:p>
-        </p:txBody>
-      </p:sp>
-      <p:sp>
-        <p:nvSpPr>
-          <p:cNvPr id="4" name="Rounded Rectangle 3"/>
-          <p:cNvSpPr/>
-          <p:nvPr/>
-        </p:nvSpPr>
-        <p:spPr>
-          <a:xfrm>
-            <a:off x="7658580" y="246888"/>
-            <a:ext cx="799619" cy="237744"/>
-          </a:xfrm>
-          <a:prstGeom prst="roundRect">
-            <a:avLst>
-              <a:gd name="adj" fmla="val 50000"/>
-            </a:avLst>
-          </a:prstGeom>
-          <a:solidFill>
-            <a:srgbClr val="34322F"/>
-          </a:solidFill>
-          <a:ln>
-            <a:noFill/>
-          </a:ln>
-          <a:effectLst/>
-        </p:spPr>
-        <p:style>
-          <a:lnRef idx="1">
-            <a:schemeClr val="accent1"/>
-          </a:lnRef>
-          <a:fillRef idx="3">
-            <a:schemeClr val="accent1"/>
-          </a:fillRef>
-          <a:effectRef idx="0">
-            <a:schemeClr val="accent1"/>
-          </a:effectRef>
-          <a:fontRef idx="minor">
-            <a:schemeClr val="lt1"/>
-          </a:fontRef>
-        </p:style>
-        <p:txBody>
-          <a:bodyPr rtlCol="0" anchor="ctr" wrap="none" lIns="0" rIns="0" tIns="0" bIns="0"/>
-          <a:lstStyle/>
-          <a:p>
-            <a:pPr algn="ctr"/>
-            <a:r>
-              <a:rPr sz="950" b="1" spc="90">
-                <a:solidFill>
-                  <a:srgbClr val="FFFDF7"/>
-                </a:solidFill>
-                <a:latin typeface="Karla"/>
-              </a:rPr>
-              <a:t>TEACH</a:t>
             </a:r>
           </a:p>
         </p:txBody>
@@ -15680,11 +15295,11 @@
               </a:spcAft>
             </a:pPr>
             <a:r>
-              <a:rPr sz="2800" b="1" i="0">
+              <a:rPr sz="2800" b="0" i="0">
                 <a:solidFill>
                   <a:srgbClr val="262422"/>
                 </a:solidFill>
-                <a:latin typeface="Libre Caslon Display"/>
+                <a:latin typeface="Georgia"/>
               </a:rPr>
               <a:t>Five questions for any headline</a:t>
             </a:r>
@@ -15836,11 +15451,11 @@
               </a:spcAft>
             </a:pPr>
             <a:r>
-              <a:rPr sz="1300" b="1" i="0">
+              <a:rPr sz="1300" b="0" i="0">
                 <a:solidFill>
                   <a:srgbClr val="262422"/>
                 </a:solidFill>
-                <a:latin typeface="Libre Caslon Display"/>
+                <a:latin typeface="Georgia"/>
               </a:rPr>
               <a:t>Who is saying it?</a:t>
             </a:r>
@@ -15883,7 +15498,7 @@
                 <a:solidFill>
                   <a:srgbClr val="56524B"/>
                 </a:solidFill>
-                <a:latin typeface="Karla"/>
+                <a:latin typeface="Calibri"/>
               </a:rPr>
               <a:t>A company, a scientist, a newspaper, a government? Check the name.</a:t>
             </a:r>
@@ -16035,11 +15650,11 @@
               </a:spcAft>
             </a:pPr>
             <a:r>
-              <a:rPr sz="1300" b="1" i="0">
+              <a:rPr sz="1300" b="0" i="0">
                 <a:solidFill>
                   <a:srgbClr val="262422"/>
                 </a:solidFill>
-                <a:latin typeface="Libre Caslon Display"/>
+                <a:latin typeface="Georgia"/>
               </a:rPr>
               <a:t>Who gains if I believe it?</a:t>
             </a:r>
@@ -16082,7 +15697,7 @@
                 <a:solidFill>
                   <a:srgbClr val="56524B"/>
                 </a:solidFill>
-                <a:latin typeface="Karla"/>
+                <a:latin typeface="Calibri"/>
               </a:rPr>
               <a:t>Somebody always does. Work out who, and what they get.</a:t>
             </a:r>
@@ -16234,11 +15849,11 @@
               </a:spcAft>
             </a:pPr>
             <a:r>
-              <a:rPr sz="1300" b="1" i="0">
+              <a:rPr sz="1300" b="0" i="0">
                 <a:solidFill>
                   <a:srgbClr val="262422"/>
                 </a:solidFill>
-                <a:latin typeface="Libre Caslon Display"/>
+                <a:latin typeface="Georgia"/>
               </a:rPr>
               <a:t>Who paid for it?</a:t>
             </a:r>
@@ -16281,7 +15896,7 @@
                 <a:solidFill>
                   <a:srgbClr val="56524B"/>
                 </a:solidFill>
-                <a:latin typeface="Karla"/>
+                <a:latin typeface="Calibri"/>
               </a:rPr>
               <a:t>The research, the advert, the survey. Money does not make it false, but you should know.</a:t>
             </a:r>
@@ -16433,11 +16048,11 @@
               </a:spcAft>
             </a:pPr>
             <a:r>
-              <a:rPr sz="1300" b="1" i="0">
+              <a:rPr sz="1300" b="0" i="0">
                 <a:solidFill>
                   <a:srgbClr val="262422"/>
                 </a:solidFill>
-                <a:latin typeface="Libre Caslon Display"/>
+                <a:latin typeface="Georgia"/>
               </a:rPr>
               <a:t>What is the evidence?</a:t>
             </a:r>
@@ -16480,7 +16095,7 @@
                 <a:solidFill>
                   <a:srgbClr val="56524B"/>
                 </a:solidFill>
-                <a:latin typeface="Karla"/>
+                <a:latin typeface="Calibri"/>
               </a:rPr>
               <a:t>A study, a number, a graph? Or only a slogan and a famous face?</a:t>
             </a:r>
@@ -16632,11 +16247,11 @@
               </a:spcAft>
             </a:pPr>
             <a:r>
-              <a:rPr sz="1300" b="1" i="0">
+              <a:rPr sz="1300" b="0" i="0">
                 <a:solidFill>
                   <a:srgbClr val="262422"/>
                 </a:solidFill>
-                <a:latin typeface="Libre Caslon Display"/>
+                <a:latin typeface="Georgia"/>
               </a:rPr>
               <a:t>Has it been tested, and by whom?</a:t>
             </a:r>
@@ -16679,7 +16294,7 @@
                 <a:solidFill>
                   <a:srgbClr val="56524B"/>
                 </a:solidFill>
-                <a:latin typeface="Karla"/>
+                <a:latin typeface="Calibri"/>
               </a:rPr>
               <a:t>Tested on whom, for how long, and by somebody with nothing to gain?</a:t>
             </a:r>
@@ -16722,7 +16337,7 @@
                 <a:solidFill>
                   <a:srgbClr val="34322F"/>
                 </a:solidFill>
-                <a:latin typeface="Karla"/>
+                <a:latin typeface="Calibri"/>
               </a:rPr>
               <a:t>These five come back in every lesson. The first one is on the front page already.</a:t>
             </a:r>
@@ -16790,7 +16405,7 @@
                 <a:solidFill>
                   <a:srgbClr val="8C877D"/>
                 </a:solidFill>
-                <a:latin typeface="Karla"/>
+                <a:latin typeface="Calibri"/>
               </a:rPr>
               <a:t>The Pastoral Guide</a:t>
             </a:r>
@@ -16833,7 +16448,7 @@
                 <a:solidFill>
                   <a:srgbClr val="8C877D"/>
                 </a:solidFill>
-                <a:latin typeface="Karla"/>
+                <a:latin typeface="Calibri"/>
               </a:rPr>
               <a:t>5 / 19</a:t>
             </a:r>
@@ -16938,7 +16553,7 @@
                 <a:solidFill>
                   <a:srgbClr val="34322F"/>
                 </a:solidFill>
-                <a:latin typeface="Karla"/>
+                <a:latin typeface="Calibri"/>
               </a:rPr>
               <a:t>QUESTION THE HEADLINE  ·  LESSON 1 OF 5</a:t>
             </a:r>
@@ -16947,19 +16562,147 @@
       </p:sp>
       <p:sp>
         <p:nvSpPr>
-          <p:cNvPr id="4" name="Rounded Rectangle 3"/>
+          <p:cNvPr id="5" name="TextBox 4"/>
+          <p:cNvSpPr txBox="1"/>
+          <p:nvPr/>
+        </p:nvSpPr>
+        <p:spPr>
+          <a:xfrm>
+            <a:off x="685800" y="566928"/>
+            <a:ext cx="7772400" cy="434848"/>
+          </a:xfrm>
+          <a:prstGeom prst="rect">
+            <a:avLst/>
+          </a:prstGeom>
+          <a:noFill/>
+          <a:effectLst/>
+        </p:spPr>
+        <p:txBody>
+          <a:bodyPr wrap="square" anchor="t" lIns="0" rIns="0" tIns="0" bIns="0">
+            <a:spAutoFit/>
+          </a:bodyPr>
+          <a:lstStyle/>
+          <a:p>
+            <a:pPr algn="l">
+              <a:lnSpc>
+                <a:spcPct val="105000"/>
+              </a:lnSpc>
+              <a:spcAft>
+                <a:spcPts val="0"/>
+              </a:spcAft>
+            </a:pPr>
+            <a:r>
+              <a:rPr sz="2800" b="0" i="0">
+                <a:solidFill>
+                  <a:srgbClr val="262422"/>
+                </a:solidFill>
+                <a:latin typeface="Georgia"/>
+              </a:rPr>
+              <a:t>Watch the first one</a:t>
+            </a:r>
+          </a:p>
+        </p:txBody>
+      </p:sp>
+      <p:sp>
+        <p:nvSpPr>
+          <p:cNvPr id="6" name="TextBox 5"/>
+          <p:cNvSpPr txBox="1"/>
+          <p:nvPr/>
+        </p:nvSpPr>
+        <p:spPr>
+          <a:xfrm>
+            <a:off x="685800" y="1170432"/>
+            <a:ext cx="7772400" cy="274320"/>
+          </a:xfrm>
+          <a:prstGeom prst="rect">
+            <a:avLst/>
+          </a:prstGeom>
+          <a:noFill/>
+          <a:effectLst/>
+        </p:spPr>
+        <p:txBody>
+          <a:bodyPr wrap="square" anchor="t" lIns="0" rIns="0" tIns="0" bIns="0">
+            <a:spAutoFit/>
+          </a:bodyPr>
+          <a:lstStyle/>
+          <a:p>
+            <a:pPr algn="l">
+              <a:lnSpc>
+                <a:spcPct val="125000"/>
+              </a:lnSpc>
+              <a:spcAft>
+                <a:spcPts val="0"/>
+              </a:spcAft>
+            </a:pPr>
+            <a:r>
+              <a:rPr sz="1600" b="0" i="0">
+                <a:solidFill>
+                  <a:srgbClr val="34322F"/>
+                </a:solidFill>
+                <a:latin typeface="Georgia"/>
+              </a:rPr>
+              <a:t>Question 1:  Who is saying it?</a:t>
+            </a:r>
+          </a:p>
+        </p:txBody>
+      </p:sp>
+      <p:sp>
+        <p:nvSpPr>
+          <p:cNvPr id="7" name="Rectangle 6"/>
           <p:cNvSpPr/>
           <p:nvPr/>
         </p:nvSpPr>
         <p:spPr>
           <a:xfrm>
-            <a:off x="7624101" y="246888"/>
-            <a:ext cx="834098" cy="237744"/>
-          </a:xfrm>
-          <a:prstGeom prst="roundRect">
-            <a:avLst>
-              <a:gd name="adj" fmla="val 50000"/>
-            </a:avLst>
+            <a:off x="685800" y="1609344"/>
+            <a:ext cx="7772400" cy="1249680"/>
+          </a:xfrm>
+          <a:prstGeom prst="rect">
+            <a:avLst/>
+          </a:prstGeom>
+          <a:solidFill>
+            <a:srgbClr val="FFFFFF"/>
+          </a:solidFill>
+          <a:ln>
+            <a:noFill/>
+          </a:ln>
+          <a:effectLst/>
+        </p:spPr>
+        <p:style>
+          <a:lnRef idx="1">
+            <a:schemeClr val="accent1"/>
+          </a:lnRef>
+          <a:fillRef idx="3">
+            <a:schemeClr val="accent1"/>
+          </a:fillRef>
+          <a:effectRef idx="0">
+            <a:schemeClr val="accent1"/>
+          </a:effectRef>
+          <a:fontRef idx="minor">
+            <a:schemeClr val="lt1"/>
+          </a:fontRef>
+        </p:style>
+        <p:txBody>
+          <a:bodyPr rtlCol="0" anchor="ctr"/>
+          <a:lstStyle/>
+          <a:p>
+            <a:pPr algn="ctr"/>
+          </a:p>
+        </p:txBody>
+      </p:sp>
+      <p:sp>
+        <p:nvSpPr>
+          <p:cNvPr id="8" name="Rectangle 7"/>
+          <p:cNvSpPr/>
+          <p:nvPr/>
+        </p:nvSpPr>
+        <p:spPr>
+          <a:xfrm>
+            <a:off x="685800" y="1609344"/>
+            <a:ext cx="45720" cy="1249680"/>
+          </a:xfrm>
+          <a:prstGeom prst="rect">
+            <a:avLst/>
           </a:prstGeom>
           <a:solidFill>
             <a:srgbClr val="34322F"/>
@@ -16984,189 +16727,6 @@
           </a:fontRef>
         </p:style>
         <p:txBody>
-          <a:bodyPr rtlCol="0" anchor="ctr" wrap="none" lIns="0" rIns="0" tIns="0" bIns="0"/>
-          <a:lstStyle/>
-          <a:p>
-            <a:pPr algn="ctr"/>
-            <a:r>
-              <a:rPr sz="950" b="1" spc="90">
-                <a:solidFill>
-                  <a:srgbClr val="FFFDF7"/>
-                </a:solidFill>
-                <a:latin typeface="Karla"/>
-              </a:rPr>
-              <a:t>MODEL</a:t>
-            </a:r>
-          </a:p>
-        </p:txBody>
-      </p:sp>
-      <p:sp>
-        <p:nvSpPr>
-          <p:cNvPr id="5" name="TextBox 4"/>
-          <p:cNvSpPr txBox="1"/>
-          <p:nvPr/>
-        </p:nvSpPr>
-        <p:spPr>
-          <a:xfrm>
-            <a:off x="685800" y="566928"/>
-            <a:ext cx="7772400" cy="434848"/>
-          </a:xfrm>
-          <a:prstGeom prst="rect">
-            <a:avLst/>
-          </a:prstGeom>
-          <a:noFill/>
-          <a:effectLst/>
-        </p:spPr>
-        <p:txBody>
-          <a:bodyPr wrap="square" anchor="t" lIns="0" rIns="0" tIns="0" bIns="0">
-            <a:spAutoFit/>
-          </a:bodyPr>
-          <a:lstStyle/>
-          <a:p>
-            <a:pPr algn="l">
-              <a:lnSpc>
-                <a:spcPct val="105000"/>
-              </a:lnSpc>
-              <a:spcAft>
-                <a:spcPts val="0"/>
-              </a:spcAft>
-            </a:pPr>
-            <a:r>
-              <a:rPr sz="2800" b="1" i="0">
-                <a:solidFill>
-                  <a:srgbClr val="262422"/>
-                </a:solidFill>
-                <a:latin typeface="Libre Caslon Display"/>
-              </a:rPr>
-              <a:t>Watch the first one</a:t>
-            </a:r>
-          </a:p>
-        </p:txBody>
-      </p:sp>
-      <p:sp>
-        <p:nvSpPr>
-          <p:cNvPr id="6" name="TextBox 5"/>
-          <p:cNvSpPr txBox="1"/>
-          <p:nvPr/>
-        </p:nvSpPr>
-        <p:spPr>
-          <a:xfrm>
-            <a:off x="685800" y="1170432"/>
-            <a:ext cx="7772400" cy="274320"/>
-          </a:xfrm>
-          <a:prstGeom prst="rect">
-            <a:avLst/>
-          </a:prstGeom>
-          <a:noFill/>
-          <a:effectLst/>
-        </p:spPr>
-        <p:txBody>
-          <a:bodyPr wrap="square" anchor="t" lIns="0" rIns="0" tIns="0" bIns="0">
-            <a:spAutoFit/>
-          </a:bodyPr>
-          <a:lstStyle/>
-          <a:p>
-            <a:pPr algn="l">
-              <a:lnSpc>
-                <a:spcPct val="125000"/>
-              </a:lnSpc>
-              <a:spcAft>
-                <a:spcPts val="0"/>
-              </a:spcAft>
-            </a:pPr>
-            <a:r>
-              <a:rPr sz="1600" b="1" i="0">
-                <a:solidFill>
-                  <a:srgbClr val="34322F"/>
-                </a:solidFill>
-                <a:latin typeface="Libre Caslon Display"/>
-              </a:rPr>
-              <a:t>Question 1:  Who is saying it?</a:t>
-            </a:r>
-          </a:p>
-        </p:txBody>
-      </p:sp>
-      <p:sp>
-        <p:nvSpPr>
-          <p:cNvPr id="7" name="Rectangle 6"/>
-          <p:cNvSpPr/>
-          <p:nvPr/>
-        </p:nvSpPr>
-        <p:spPr>
-          <a:xfrm>
-            <a:off x="685800" y="1609344"/>
-            <a:ext cx="7772400" cy="1249680"/>
-          </a:xfrm>
-          <a:prstGeom prst="rect">
-            <a:avLst/>
-          </a:prstGeom>
-          <a:solidFill>
-            <a:srgbClr val="FFFFFF"/>
-          </a:solidFill>
-          <a:ln>
-            <a:noFill/>
-          </a:ln>
-          <a:effectLst/>
-        </p:spPr>
-        <p:style>
-          <a:lnRef idx="1">
-            <a:schemeClr val="accent1"/>
-          </a:lnRef>
-          <a:fillRef idx="3">
-            <a:schemeClr val="accent1"/>
-          </a:fillRef>
-          <a:effectRef idx="0">
-            <a:schemeClr val="accent1"/>
-          </a:effectRef>
-          <a:fontRef idx="minor">
-            <a:schemeClr val="lt1"/>
-          </a:fontRef>
-        </p:style>
-        <p:txBody>
-          <a:bodyPr rtlCol="0" anchor="ctr"/>
-          <a:lstStyle/>
-          <a:p>
-            <a:pPr algn="ctr"/>
-          </a:p>
-        </p:txBody>
-      </p:sp>
-      <p:sp>
-        <p:nvSpPr>
-          <p:cNvPr id="8" name="Rectangle 7"/>
-          <p:cNvSpPr/>
-          <p:nvPr/>
-        </p:nvSpPr>
-        <p:spPr>
-          <a:xfrm>
-            <a:off x="685800" y="1609344"/>
-            <a:ext cx="45720" cy="1249680"/>
-          </a:xfrm>
-          <a:prstGeom prst="rect">
-            <a:avLst/>
-          </a:prstGeom>
-          <a:solidFill>
-            <a:srgbClr val="34322F"/>
-          </a:solidFill>
-          <a:ln>
-            <a:noFill/>
-          </a:ln>
-          <a:effectLst/>
-        </p:spPr>
-        <p:style>
-          <a:lnRef idx="1">
-            <a:schemeClr val="accent1"/>
-          </a:lnRef>
-          <a:fillRef idx="3">
-            <a:schemeClr val="accent1"/>
-          </a:fillRef>
-          <a:effectRef idx="0">
-            <a:schemeClr val="accent1"/>
-          </a:effectRef>
-          <a:fontRef idx="minor">
-            <a:schemeClr val="lt1"/>
-          </a:fontRef>
-        </p:style>
-        <p:txBody>
           <a:bodyPr rtlCol="0" anchor="ctr"/>
           <a:lstStyle/>
           <a:p>
@@ -17210,7 +16770,7 @@
                 <a:solidFill>
                   <a:srgbClr val="262422"/>
                 </a:solidFill>
-                <a:latin typeface="Karla"/>
+                <a:latin typeface="Calibri"/>
               </a:rPr>
               <a:t>Scientists from Harvard, writing in one of the most respected medical journals. That sounds trustworthy. What the front page does not say is who paid for the work.</a:t>
             </a:r>
@@ -17253,7 +16813,7 @@
                 <a:solidFill>
                   <a:srgbClr val="56524B"/>
                 </a:solidFill>
-                <a:latin typeface="Karla"/>
+                <a:latin typeface="Calibri"/>
               </a:rPr>
               <a:t>Notice the answer is not true or false. It tells you what to look for next.</a:t>
             </a:r>
@@ -17321,7 +16881,7 @@
                 <a:solidFill>
                   <a:srgbClr val="8C877D"/>
                 </a:solidFill>
-                <a:latin typeface="Karla"/>
+                <a:latin typeface="Calibri"/>
               </a:rPr>
               <a:t>The Pastoral Guide</a:t>
             </a:r>
@@ -17364,7 +16924,7 @@
                 <a:solidFill>
                   <a:srgbClr val="8C877D"/>
                 </a:solidFill>
-                <a:latin typeface="Karla"/>
+                <a:latin typeface="Calibri"/>
               </a:rPr>
               <a:t>6 / 19</a:t>
             </a:r>
@@ -17469,64 +17029,9 @@
                 <a:solidFill>
                   <a:srgbClr val="34322F"/>
                 </a:solidFill>
-                <a:latin typeface="Karla"/>
+                <a:latin typeface="Calibri"/>
               </a:rPr>
               <a:t>QUESTION THE HEADLINE  ·  LESSON 1 OF 5</a:t>
-            </a:r>
-          </a:p>
-        </p:txBody>
-      </p:sp>
-      <p:sp>
-        <p:nvSpPr>
-          <p:cNvPr id="4" name="Rounded Rectangle 3"/>
-          <p:cNvSpPr/>
-          <p:nvPr/>
-        </p:nvSpPr>
-        <p:spPr>
-          <a:xfrm>
-            <a:off x="7356624" y="246888"/>
-            <a:ext cx="1101575" cy="237744"/>
-          </a:xfrm>
-          <a:prstGeom prst="roundRect">
-            <a:avLst>
-              <a:gd name="adj" fmla="val 50000"/>
-            </a:avLst>
-          </a:prstGeom>
-          <a:solidFill>
-            <a:srgbClr val="34322F"/>
-          </a:solidFill>
-          <a:ln>
-            <a:noFill/>
-          </a:ln>
-          <a:effectLst/>
-        </p:spPr>
-        <p:style>
-          <a:lnRef idx="1">
-            <a:schemeClr val="accent1"/>
-          </a:lnRef>
-          <a:fillRef idx="3">
-            <a:schemeClr val="accent1"/>
-          </a:fillRef>
-          <a:effectRef idx="0">
-            <a:schemeClr val="accent1"/>
-          </a:effectRef>
-          <a:fontRef idx="minor">
-            <a:schemeClr val="lt1"/>
-          </a:fontRef>
-        </p:style>
-        <p:txBody>
-          <a:bodyPr rtlCol="0" anchor="ctr" wrap="none" lIns="0" rIns="0" tIns="0" bIns="0"/>
-          <a:lstStyle/>
-          <a:p>
-            <a:pPr algn="ctr"/>
-            <a:r>
-              <a:rPr sz="950" b="1" spc="90">
-                <a:solidFill>
-                  <a:srgbClr val="FFFDF7"/>
-                </a:solidFill>
-                <a:latin typeface="Karla"/>
-              </a:rPr>
-              <a:t>TOGETHER</a:t>
             </a:r>
           </a:p>
         </p:txBody>
@@ -17563,11 +17068,11 @@
               </a:spcAft>
             </a:pPr>
             <a:r>
-              <a:rPr sz="2800" b="1" i="0">
+              <a:rPr sz="2800" b="0" i="0">
                 <a:solidFill>
                   <a:srgbClr val="262422"/>
                 </a:solidFill>
-                <a:latin typeface="Libre Caslon Display"/>
+                <a:latin typeface="Georgia"/>
               </a:rPr>
               <a:t>Now the other four</a:t>
             </a:r>
@@ -17610,7 +17115,7 @@
                 <a:solidFill>
                   <a:srgbClr val="56524B"/>
                 </a:solidFill>
-                <a:latin typeface="Karla"/>
+                <a:latin typeface="Calibri"/>
               </a:rPr>
               <a:t>Can the front page answer them? Talk it through in your group.</a:t>
             </a:r>
@@ -17806,11 +17311,11 @@
               </a:spcAft>
             </a:pPr>
             <a:r>
-              <a:rPr sz="1300" b="1" i="0">
+              <a:rPr sz="1300" b="0" i="0">
                 <a:solidFill>
                   <a:srgbClr val="262422"/>
                 </a:solidFill>
-                <a:latin typeface="Libre Caslon Display"/>
+                <a:latin typeface="Georgia"/>
               </a:rPr>
               <a:t>Who gains if I believe it?</a:t>
             </a:r>
@@ -18006,11 +17511,11 @@
               </a:spcAft>
             </a:pPr>
             <a:r>
-              <a:rPr sz="1300" b="1" i="0">
+              <a:rPr sz="1300" b="0" i="0">
                 <a:solidFill>
                   <a:srgbClr val="262422"/>
                 </a:solidFill>
-                <a:latin typeface="Libre Caslon Display"/>
+                <a:latin typeface="Georgia"/>
               </a:rPr>
               <a:t>Who paid for it?</a:t>
             </a:r>
@@ -18206,11 +17711,11 @@
               </a:spcAft>
             </a:pPr>
             <a:r>
-              <a:rPr sz="1300" b="1" i="0">
+              <a:rPr sz="1300" b="0" i="0">
                 <a:solidFill>
                   <a:srgbClr val="262422"/>
                 </a:solidFill>
-                <a:latin typeface="Libre Caslon Display"/>
+                <a:latin typeface="Georgia"/>
               </a:rPr>
               <a:t>What is the evidence?</a:t>
             </a:r>
@@ -18406,11 +17911,11 @@
               </a:spcAft>
             </a:pPr>
             <a:r>
-              <a:rPr sz="1300" b="1" i="0">
+              <a:rPr sz="1300" b="0" i="0">
                 <a:solidFill>
                   <a:srgbClr val="262422"/>
                 </a:solidFill>
-                <a:latin typeface="Libre Caslon Display"/>
+                <a:latin typeface="Georgia"/>
               </a:rPr>
               <a:t>Has it been tested, and by whom?</a:t>
             </a:r>
@@ -18453,7 +17958,7 @@
                 <a:solidFill>
                   <a:srgbClr val="34322F"/>
                 </a:solidFill>
-                <a:latin typeface="Karla"/>
+                <a:latin typeface="Calibri"/>
               </a:rPr>
               <a:t>Then fill in the top of your evidence sheet: where you stand, and what you would need to know.</a:t>
             </a:r>
@@ -18521,7 +18026,7 @@
                 <a:solidFill>
                   <a:srgbClr val="8C877D"/>
                 </a:solidFill>
-                <a:latin typeface="Karla"/>
+                <a:latin typeface="Calibri"/>
               </a:rPr>
               <a:t>The Pastoral Guide</a:t>
             </a:r>
@@ -18564,7 +18069,7 @@
                 <a:solidFill>
                   <a:srgbClr val="8C877D"/>
                 </a:solidFill>
-                <a:latin typeface="Karla"/>
+                <a:latin typeface="Calibri"/>
               </a:rPr>
               <a:t>7 / 19</a:t>
             </a:r>
@@ -18669,7 +18174,7 @@
                 <a:solidFill>
                   <a:srgbClr val="34322F"/>
                 </a:solidFill>
-                <a:latin typeface="Karla"/>
+                <a:latin typeface="Calibri"/>
               </a:rPr>
               <a:t>QUESTION THE HEADLINE  ·  LESSON 1 OF 5</a:t>
             </a:r>
@@ -18724,7 +18229,7 @@
                 <a:solidFill>
                   <a:srgbClr val="FFFDF7"/>
                 </a:solidFill>
-                <a:latin typeface="Karla"/>
+                <a:latin typeface="Calibri"/>
               </a:rPr>
               <a:t>ROUND 1 OF 4</a:t>
             </a:r>
@@ -18811,7 +18316,7 @@
                 <a:solidFill>
                   <a:srgbClr val="FFFDF7"/>
                 </a:solidFill>
-                <a:latin typeface="Karla"/>
+                <a:latin typeface="Calibri"/>
               </a:rPr>
               <a:t>EVIDENCE A</a:t>
             </a:r>
@@ -18938,11 +18443,11 @@
               </a:spcAft>
             </a:pPr>
             <a:r>
-              <a:rPr sz="2200" b="1" i="0">
+              <a:rPr sz="2200" b="0" i="0">
                 <a:solidFill>
                   <a:srgbClr val="262422"/>
                 </a:solidFill>
-                <a:latin typeface="Libre Caslon Display"/>
+                <a:latin typeface="Georgia"/>
               </a:rPr>
               <a:t>The authors</a:t>
             </a:r>
@@ -19028,7 +18533,7 @@
                 <a:solidFill>
                   <a:srgbClr val="8C877D"/>
                 </a:solidFill>
-                <a:latin typeface="Karla"/>
+                <a:latin typeface="Calibri"/>
               </a:rPr>
               <a:t>Source: STAT News, 12 September 2016</a:t>
             </a:r>
@@ -19071,7 +18576,7 @@
                 <a:solidFill>
                   <a:srgbClr val="34322F"/>
                 </a:solidFill>
-                <a:latin typeface="Karla"/>
+                <a:latin typeface="Calibri"/>
               </a:rPr>
               <a:t>Read it as a group. Fill in the card A row on your evidence sheet, then move on the line.</a:t>
             </a:r>
@@ -19139,7 +18644,7 @@
                 <a:solidFill>
                   <a:srgbClr val="8C877D"/>
                 </a:solidFill>
-                <a:latin typeface="Karla"/>
+                <a:latin typeface="Calibri"/>
               </a:rPr>
               <a:t>The Pastoral Guide</a:t>
             </a:r>
@@ -19182,7 +18687,7 @@
                 <a:solidFill>
                   <a:srgbClr val="8C877D"/>
                 </a:solidFill>
-                <a:latin typeface="Karla"/>
+                <a:latin typeface="Calibri"/>
               </a:rPr>
               <a:t>8 / 19</a:t>
             </a:r>
@@ -19287,7 +18792,7 @@
                 <a:solidFill>
                   <a:srgbClr val="34322F"/>
                 </a:solidFill>
-                <a:latin typeface="Karla"/>
+                <a:latin typeface="Calibri"/>
               </a:rPr>
               <a:t>QUESTION THE HEADLINE  ·  LESSON 1 OF 5</a:t>
             </a:r>
@@ -19342,7 +18847,7 @@
                 <a:solidFill>
                   <a:srgbClr val="FFFDF7"/>
                 </a:solidFill>
-                <a:latin typeface="Karla"/>
+                <a:latin typeface="Calibri"/>
               </a:rPr>
               <a:t>ROUND 2 OF 4</a:t>
             </a:r>
@@ -19429,7 +18934,7 @@
                 <a:solidFill>
                   <a:srgbClr val="FFFDF7"/>
                 </a:solidFill>
-                <a:latin typeface="Karla"/>
+                <a:latin typeface="Calibri"/>
               </a:rPr>
               <a:t>EVIDENCE B</a:t>
             </a:r>
@@ -19556,11 +19061,11 @@
               </a:spcAft>
             </a:pPr>
             <a:r>
-              <a:rPr sz="2200" b="1" i="0">
+              <a:rPr sz="2200" b="0" i="0">
                 <a:solidFill>
                   <a:srgbClr val="262422"/>
                 </a:solidFill>
-                <a:latin typeface="Libre Caslon Display"/>
+                <a:latin typeface="Georgia"/>
               </a:rPr>
               <a:t>The plan</a:t>
             </a:r>
@@ -19646,7 +19151,7 @@
                 <a:solidFill>
                   <a:srgbClr val="8C877D"/>
                 </a:solidFill>
-                <a:latin typeface="Karla"/>
+                <a:latin typeface="Calibri"/>
               </a:rPr>
               <a:t>Source: STAT News and JAMA Internal Medicine, 2016</a:t>
             </a:r>
@@ -19689,7 +19194,7 @@
                 <a:solidFill>
                   <a:srgbClr val="34322F"/>
                 </a:solidFill>
-                <a:latin typeface="Karla"/>
+                <a:latin typeface="Calibri"/>
               </a:rPr>
               <a:t>Read it as a group. Fill in the card B row on your evidence sheet, then move on the line.</a:t>
             </a:r>
@@ -19757,7 +19262,7 @@
                 <a:solidFill>
                   <a:srgbClr val="8C877D"/>
                 </a:solidFill>
-                <a:latin typeface="Karla"/>
+                <a:latin typeface="Calibri"/>
               </a:rPr>
               <a:t>The Pastoral Guide</a:t>
             </a:r>
@@ -19800,7 +19305,7 @@
                 <a:solidFill>
                   <a:srgbClr val="8C877D"/>
                 </a:solidFill>
-                <a:latin typeface="Karla"/>
+                <a:latin typeface="Calibri"/>
               </a:rPr>
               <a:t>9 / 19</a:t>
             </a:r>
